--- a/Report/Mini project report.pptx
+++ b/Report/Mini project report.pptx
@@ -127,7 +127,7 @@
 <file path=ppt/revisionInfo.xml><?xml version="1.0" encoding="utf-8"?>
 <p1510:revInfo xmlns:a="http://schemas.openxmlformats.org/drawingml/2006/main" xmlns:r="http://schemas.openxmlformats.org/officeDocument/2006/relationships" xmlns:p1510="http://schemas.microsoft.com/office/powerpoint/2015/10/main">
   <p1510:revLst>
-    <p1510:client id="{2C0CA6C2-B48C-42E9-8F5A-3A3E67C47957}" v="14" dt="2026-08-22T11:47:08.241"/>
+    <p1510:client id="{2C0CA6C2-B48C-42E9-8F5A-3A3E67C47957}" v="15" dt="2026-08-22T11:56:46.722"/>
   </p1510:revLst>
 </p1510:revInfo>
 </file>
@@ -137,12 +137,12 @@
   <pc:docChgLst>
     <pc:chgData name="David Irungu" userId="3570a5346c53ff8c" providerId="LiveId" clId="{B3EF4350-6A02-4366-A4A5-47E00D9EF2BB}"/>
     <pc:docChg chg="undo custSel addSld modSld">
-      <pc:chgData name="David Irungu" userId="3570a5346c53ff8c" providerId="LiveId" clId="{B3EF4350-6A02-4366-A4A5-47E00D9EF2BB}" dt="2026-08-22T11:51:52.140" v="798" actId="14100"/>
+      <pc:chgData name="David Irungu" userId="3570a5346c53ff8c" providerId="LiveId" clId="{B3EF4350-6A02-4366-A4A5-47E00D9EF2BB}" dt="2026-08-22T12:00:29.323" v="853" actId="20577"/>
       <pc:docMkLst>
         <pc:docMk/>
       </pc:docMkLst>
       <pc:sldChg chg="modSp mod">
-        <pc:chgData name="David Irungu" userId="3570a5346c53ff8c" providerId="LiveId" clId="{B3EF4350-6A02-4366-A4A5-47E00D9EF2BB}" dt="2026-08-22T11:42:58.709" v="696" actId="20577"/>
+        <pc:chgData name="David Irungu" userId="3570a5346c53ff8c" providerId="LiveId" clId="{B3EF4350-6A02-4366-A4A5-47E00D9EF2BB}" dt="2026-08-22T11:55:41.241" v="802" actId="403"/>
         <pc:sldMkLst>
           <pc:docMk/>
           <pc:sldMk cId="0" sldId="256"/>
@@ -156,7 +156,7 @@
           </ac:spMkLst>
         </pc:spChg>
         <pc:spChg chg="mod">
-          <ac:chgData name="David Irungu" userId="3570a5346c53ff8c" providerId="LiveId" clId="{B3EF4350-6A02-4366-A4A5-47E00D9EF2BB}" dt="2026-08-22T11:42:48.471" v="695" actId="403"/>
+          <ac:chgData name="David Irungu" userId="3570a5346c53ff8c" providerId="LiveId" clId="{B3EF4350-6A02-4366-A4A5-47E00D9EF2BB}" dt="2026-08-22T11:55:41.241" v="802" actId="403"/>
           <ac:spMkLst>
             <pc:docMk/>
             <pc:sldMk cId="0" sldId="256"/>
@@ -196,7 +196,7 @@
         </pc:spChg>
       </pc:sldChg>
       <pc:sldChg chg="addSp delSp modSp mod">
-        <pc:chgData name="David Irungu" userId="3570a5346c53ff8c" providerId="LiveId" clId="{B3EF4350-6A02-4366-A4A5-47E00D9EF2BB}" dt="2026-08-22T11:49:14.903" v="748" actId="22"/>
+        <pc:chgData name="David Irungu" userId="3570a5346c53ff8c" providerId="LiveId" clId="{B3EF4350-6A02-4366-A4A5-47E00D9EF2BB}" dt="2026-08-22T11:58:10.457" v="826" actId="2710"/>
         <pc:sldMkLst>
           <pc:docMk/>
           <pc:sldMk cId="0" sldId="258"/>
@@ -209,16 +209,24 @@
             <ac:spMk id="3" creationId="{00000000-0000-0000-0000-000000000000}"/>
           </ac:spMkLst>
         </pc:spChg>
-        <pc:spChg chg="mod">
-          <ac:chgData name="David Irungu" userId="3570a5346c53ff8c" providerId="LiveId" clId="{B3EF4350-6A02-4366-A4A5-47E00D9EF2BB}" dt="2026-08-22T11:45:20.630" v="727" actId="1076"/>
+        <pc:spChg chg="add del mod">
+          <ac:chgData name="David Irungu" userId="3570a5346c53ff8c" providerId="LiveId" clId="{B3EF4350-6A02-4366-A4A5-47E00D9EF2BB}" dt="2026-08-22T11:57:18.533" v="813"/>
+          <ac:spMkLst>
+            <pc:docMk/>
+            <pc:sldMk cId="0" sldId="258"/>
+            <ac:spMk id="3" creationId="{7075BC22-4187-BB97-87E0-CA6AF4768667}"/>
+          </ac:spMkLst>
+        </pc:spChg>
+        <pc:spChg chg="del mod">
+          <ac:chgData name="David Irungu" userId="3570a5346c53ff8c" providerId="LiveId" clId="{B3EF4350-6A02-4366-A4A5-47E00D9EF2BB}" dt="2026-08-22T11:56:35.754" v="806" actId="478"/>
           <ac:spMkLst>
             <pc:docMk/>
             <pc:sldMk cId="0" sldId="258"/>
             <ac:spMk id="5" creationId="{00000000-0000-0000-0000-000000000000}"/>
           </ac:spMkLst>
         </pc:spChg>
-        <pc:spChg chg="mod">
-          <ac:chgData name="David Irungu" userId="3570a5346c53ff8c" providerId="LiveId" clId="{B3EF4350-6A02-4366-A4A5-47E00D9EF2BB}" dt="2026-08-22T11:47:37.314" v="738" actId="403"/>
+        <pc:spChg chg="del mod">
+          <ac:chgData name="David Irungu" userId="3570a5346c53ff8c" providerId="LiveId" clId="{B3EF4350-6A02-4366-A4A5-47E00D9EF2BB}" dt="2026-08-22T11:56:35.754" v="806" actId="478"/>
           <ac:spMkLst>
             <pc:docMk/>
             <pc:sldMk cId="0" sldId="258"/>
@@ -233,16 +241,24 @@
             <ac:spMk id="7" creationId="{00000000-0000-0000-0000-000000000000}"/>
           </ac:spMkLst>
         </pc:spChg>
-        <pc:spChg chg="mod">
-          <ac:chgData name="David Irungu" userId="3570a5346c53ff8c" providerId="LiveId" clId="{B3EF4350-6A02-4366-A4A5-47E00D9EF2BB}" dt="2026-08-22T11:48:59.137" v="747" actId="20577"/>
+        <pc:spChg chg="add del">
+          <ac:chgData name="David Irungu" userId="3570a5346c53ff8c" providerId="LiveId" clId="{B3EF4350-6A02-4366-A4A5-47E00D9EF2BB}" dt="2026-08-22T11:56:59.311" v="809" actId="22"/>
+          <ac:spMkLst>
+            <pc:docMk/>
+            <pc:sldMk cId="0" sldId="258"/>
+            <ac:spMk id="7" creationId="{DA9532E6-E8FD-C409-439D-4230F36CF85F}"/>
+          </ac:spMkLst>
+        </pc:spChg>
+        <pc:spChg chg="del mod">
+          <ac:chgData name="David Irungu" userId="3570a5346c53ff8c" providerId="LiveId" clId="{B3EF4350-6A02-4366-A4A5-47E00D9EF2BB}" dt="2026-08-22T11:56:35.754" v="806" actId="478"/>
           <ac:spMkLst>
             <pc:docMk/>
             <pc:sldMk cId="0" sldId="258"/>
             <ac:spMk id="9" creationId="{00000000-0000-0000-0000-000000000000}"/>
           </ac:spMkLst>
         </pc:spChg>
-        <pc:spChg chg="mod">
-          <ac:chgData name="David Irungu" userId="3570a5346c53ff8c" providerId="LiveId" clId="{B3EF4350-6A02-4366-A4A5-47E00D9EF2BB}" dt="2026-08-22T11:45:20.630" v="727" actId="1076"/>
+        <pc:spChg chg="del mod">
+          <ac:chgData name="David Irungu" userId="3570a5346c53ff8c" providerId="LiveId" clId="{B3EF4350-6A02-4366-A4A5-47E00D9EF2BB}" dt="2026-08-22T11:56:35.754" v="806" actId="478"/>
           <ac:spMkLst>
             <pc:docMk/>
             <pc:sldMk cId="0" sldId="258"/>
@@ -257,16 +273,24 @@
             <ac:spMk id="11" creationId="{00000000-0000-0000-0000-000000000000}"/>
           </ac:spMkLst>
         </pc:spChg>
-        <pc:spChg chg="mod">
-          <ac:chgData name="David Irungu" userId="3570a5346c53ff8c" providerId="LiveId" clId="{B3EF4350-6A02-4366-A4A5-47E00D9EF2BB}" dt="2026-08-22T11:45:20.630" v="727" actId="1076"/>
+        <pc:spChg chg="add del">
+          <ac:chgData name="David Irungu" userId="3570a5346c53ff8c" providerId="LiveId" clId="{B3EF4350-6A02-4366-A4A5-47E00D9EF2BB}" dt="2026-08-22T11:56:59.311" v="809" actId="22"/>
+          <ac:spMkLst>
+            <pc:docMk/>
+            <pc:sldMk cId="0" sldId="258"/>
+            <ac:spMk id="11" creationId="{64FF471D-2185-13FF-5973-215F7F81050E}"/>
+          </ac:spMkLst>
+        </pc:spChg>
+        <pc:spChg chg="del mod">
+          <ac:chgData name="David Irungu" userId="3570a5346c53ff8c" providerId="LiveId" clId="{B3EF4350-6A02-4366-A4A5-47E00D9EF2BB}" dt="2026-08-22T11:56:35.754" v="806" actId="478"/>
           <ac:spMkLst>
             <pc:docMk/>
             <pc:sldMk cId="0" sldId="258"/>
             <ac:spMk id="13" creationId="{00000000-0000-0000-0000-000000000000}"/>
           </ac:spMkLst>
         </pc:spChg>
-        <pc:spChg chg="mod">
-          <ac:chgData name="David Irungu" userId="3570a5346c53ff8c" providerId="LiveId" clId="{B3EF4350-6A02-4366-A4A5-47E00D9EF2BB}" dt="2026-08-22T11:45:20.630" v="727" actId="1076"/>
+        <pc:spChg chg="del mod">
+          <ac:chgData name="David Irungu" userId="3570a5346c53ff8c" providerId="LiveId" clId="{B3EF4350-6A02-4366-A4A5-47E00D9EF2BB}" dt="2026-08-22T11:56:35.754" v="806" actId="478"/>
           <ac:spMkLst>
             <pc:docMk/>
             <pc:sldMk cId="0" sldId="258"/>
@@ -281,28 +305,156 @@
             <ac:spMk id="15" creationId="{00000000-0000-0000-0000-000000000000}"/>
           </ac:spMkLst>
         </pc:spChg>
-        <pc:spChg chg="mod">
-          <ac:chgData name="David Irungu" userId="3570a5346c53ff8c" providerId="LiveId" clId="{B3EF4350-6A02-4366-A4A5-47E00D9EF2BB}" dt="2026-08-22T11:45:20.630" v="727" actId="1076"/>
+        <pc:spChg chg="add del">
+          <ac:chgData name="David Irungu" userId="3570a5346c53ff8c" providerId="LiveId" clId="{B3EF4350-6A02-4366-A4A5-47E00D9EF2BB}" dt="2026-08-22T11:56:59.311" v="809" actId="22"/>
+          <ac:spMkLst>
+            <pc:docMk/>
+            <pc:sldMk cId="0" sldId="258"/>
+            <ac:spMk id="16" creationId="{61BCDEB4-233B-86D8-6627-AC260DF6C758}"/>
+          </ac:spMkLst>
+        </pc:spChg>
+        <pc:spChg chg="del mod">
+          <ac:chgData name="David Irungu" userId="3570a5346c53ff8c" providerId="LiveId" clId="{B3EF4350-6A02-4366-A4A5-47E00D9EF2BB}" dt="2026-08-22T11:56:35.754" v="806" actId="478"/>
           <ac:spMkLst>
             <pc:docMk/>
             <pc:sldMk cId="0" sldId="258"/>
             <ac:spMk id="17" creationId="{00000000-0000-0000-0000-000000000000}"/>
           </ac:spMkLst>
         </pc:spChg>
-        <pc:spChg chg="mod">
-          <ac:chgData name="David Irungu" userId="3570a5346c53ff8c" providerId="LiveId" clId="{B3EF4350-6A02-4366-A4A5-47E00D9EF2BB}" dt="2026-08-22T11:45:20.630" v="727" actId="1076"/>
+        <pc:spChg chg="del mod">
+          <ac:chgData name="David Irungu" userId="3570a5346c53ff8c" providerId="LiveId" clId="{B3EF4350-6A02-4366-A4A5-47E00D9EF2BB}" dt="2026-08-22T11:56:35.754" v="806" actId="478"/>
           <ac:spMkLst>
             <pc:docMk/>
             <pc:sldMk cId="0" sldId="258"/>
             <ac:spMk id="18" creationId="{00000000-0000-0000-0000-000000000000}"/>
           </ac:spMkLst>
         </pc:spChg>
-        <pc:spChg chg="add">
-          <ac:chgData name="David Irungu" userId="3570a5346c53ff8c" providerId="LiveId" clId="{B3EF4350-6A02-4366-A4A5-47E00D9EF2BB}" dt="2026-08-22T11:49:14.903" v="748" actId="22"/>
+        <pc:spChg chg="add del mod">
+          <ac:chgData name="David Irungu" userId="3570a5346c53ff8c" providerId="LiveId" clId="{B3EF4350-6A02-4366-A4A5-47E00D9EF2BB}" dt="2026-08-22T11:55:56.537" v="805" actId="478"/>
           <ac:spMkLst>
             <pc:docMk/>
             <pc:sldMk cId="0" sldId="258"/>
             <ac:spMk id="20" creationId="{D484B50B-0035-4F16-CA8A-B737DC1E46F7}"/>
+          </ac:spMkLst>
+        </pc:spChg>
+        <pc:spChg chg="add del">
+          <ac:chgData name="David Irungu" userId="3570a5346c53ff8c" providerId="LiveId" clId="{B3EF4350-6A02-4366-A4A5-47E00D9EF2BB}" dt="2026-08-22T11:56:59.311" v="809" actId="22"/>
+          <ac:spMkLst>
+            <pc:docMk/>
+            <pc:sldMk cId="0" sldId="258"/>
+            <ac:spMk id="21" creationId="{048FE746-21BE-CC23-5C9D-A833E3045B05}"/>
+          </ac:spMkLst>
+        </pc:spChg>
+        <pc:spChg chg="add del">
+          <ac:chgData name="David Irungu" userId="3570a5346c53ff8c" providerId="LiveId" clId="{B3EF4350-6A02-4366-A4A5-47E00D9EF2BB}" dt="2026-08-22T11:56:59.311" v="809" actId="22"/>
+          <ac:spMkLst>
+            <pc:docMk/>
+            <pc:sldMk cId="0" sldId="258"/>
+            <ac:spMk id="23" creationId="{B7C0C32A-9588-3369-2263-E38589D73AF1}"/>
+          </ac:spMkLst>
+        </pc:spChg>
+        <pc:spChg chg="add del">
+          <ac:chgData name="David Irungu" userId="3570a5346c53ff8c" providerId="LiveId" clId="{B3EF4350-6A02-4366-A4A5-47E00D9EF2BB}" dt="2026-08-22T11:56:59.311" v="809" actId="22"/>
+          <ac:spMkLst>
+            <pc:docMk/>
+            <pc:sldMk cId="0" sldId="258"/>
+            <ac:spMk id="27" creationId="{C90CB12A-4228-D069-1B16-97D339E96038}"/>
+          </ac:spMkLst>
+        </pc:spChg>
+        <pc:spChg chg="add del">
+          <ac:chgData name="David Irungu" userId="3570a5346c53ff8c" providerId="LiveId" clId="{B3EF4350-6A02-4366-A4A5-47E00D9EF2BB}" dt="2026-08-22T11:56:59.311" v="809" actId="22"/>
+          <ac:spMkLst>
+            <pc:docMk/>
+            <pc:sldMk cId="0" sldId="258"/>
+            <ac:spMk id="29" creationId="{E79488D8-45F0-5874-36CF-BE3382B9D1C0}"/>
+          </ac:spMkLst>
+        </pc:spChg>
+        <pc:spChg chg="add del">
+          <ac:chgData name="David Irungu" userId="3570a5346c53ff8c" providerId="LiveId" clId="{B3EF4350-6A02-4366-A4A5-47E00D9EF2BB}" dt="2026-08-22T11:56:59.311" v="809" actId="22"/>
+          <ac:spMkLst>
+            <pc:docMk/>
+            <pc:sldMk cId="0" sldId="258"/>
+            <ac:spMk id="31" creationId="{17AD7D6A-E36A-1F32-C61E-D541E111FE54}"/>
+          </ac:spMkLst>
+        </pc:spChg>
+        <pc:spChg chg="add del">
+          <ac:chgData name="David Irungu" userId="3570a5346c53ff8c" providerId="LiveId" clId="{B3EF4350-6A02-4366-A4A5-47E00D9EF2BB}" dt="2026-08-22T11:56:59.311" v="809" actId="22"/>
+          <ac:spMkLst>
+            <pc:docMk/>
+            <pc:sldMk cId="0" sldId="258"/>
+            <ac:spMk id="33" creationId="{EE7322C2-D19D-AAC6-6DA1-E37A12DADCA6}"/>
+          </ac:spMkLst>
+        </pc:spChg>
+        <pc:spChg chg="add">
+          <ac:chgData name="David Irungu" userId="3570a5346c53ff8c" providerId="LiveId" clId="{B3EF4350-6A02-4366-A4A5-47E00D9EF2BB}" dt="2026-08-22T11:57:14.310" v="810" actId="22"/>
+          <ac:spMkLst>
+            <pc:docMk/>
+            <pc:sldMk cId="0" sldId="258"/>
+            <ac:spMk id="35" creationId="{59F01768-461B-702D-7A36-27C4BE1FB068}"/>
+          </ac:spMkLst>
+        </pc:spChg>
+        <pc:spChg chg="add mod">
+          <ac:chgData name="David Irungu" userId="3570a5346c53ff8c" providerId="LiveId" clId="{B3EF4350-6A02-4366-A4A5-47E00D9EF2BB}" dt="2026-08-22T11:58:10.457" v="826" actId="2710"/>
+          <ac:spMkLst>
+            <pc:docMk/>
+            <pc:sldMk cId="0" sldId="258"/>
+            <ac:spMk id="37" creationId="{67FB1887-B6CE-4990-FE3D-D4717C05961F}"/>
+          </ac:spMkLst>
+        </pc:spChg>
+        <pc:spChg chg="add mod">
+          <ac:chgData name="David Irungu" userId="3570a5346c53ff8c" providerId="LiveId" clId="{B3EF4350-6A02-4366-A4A5-47E00D9EF2BB}" dt="2026-08-22T11:58:10.457" v="826" actId="2710"/>
+          <ac:spMkLst>
+            <pc:docMk/>
+            <pc:sldMk cId="0" sldId="258"/>
+            <ac:spMk id="39" creationId="{68F9653F-6FE0-A3A2-6F81-C75031692EF3}"/>
+          </ac:spMkLst>
+        </pc:spChg>
+        <pc:spChg chg="add mod">
+          <ac:chgData name="David Irungu" userId="3570a5346c53ff8c" providerId="LiveId" clId="{B3EF4350-6A02-4366-A4A5-47E00D9EF2BB}" dt="2026-08-22T11:58:10.457" v="826" actId="2710"/>
+          <ac:spMkLst>
+            <pc:docMk/>
+            <pc:sldMk cId="0" sldId="258"/>
+            <ac:spMk id="41" creationId="{88D82258-D096-E8D9-D1BE-50C9BD7D302D}"/>
+          </ac:spMkLst>
+        </pc:spChg>
+        <pc:spChg chg="add mod">
+          <ac:chgData name="David Irungu" userId="3570a5346c53ff8c" providerId="LiveId" clId="{B3EF4350-6A02-4366-A4A5-47E00D9EF2BB}" dt="2026-08-22T11:58:10.457" v="826" actId="2710"/>
+          <ac:spMkLst>
+            <pc:docMk/>
+            <pc:sldMk cId="0" sldId="258"/>
+            <ac:spMk id="43" creationId="{A9B4A275-5C19-B13F-5363-D964C8646D51}"/>
+          </ac:spMkLst>
+        </pc:spChg>
+        <pc:spChg chg="add mod">
+          <ac:chgData name="David Irungu" userId="3570a5346c53ff8c" providerId="LiveId" clId="{B3EF4350-6A02-4366-A4A5-47E00D9EF2BB}" dt="2026-08-22T11:58:10.457" v="826" actId="2710"/>
+          <ac:spMkLst>
+            <pc:docMk/>
+            <pc:sldMk cId="0" sldId="258"/>
+            <ac:spMk id="47" creationId="{E01EBB16-7DC1-2A20-BD05-1CDD29D7B41D}"/>
+          </ac:spMkLst>
+        </pc:spChg>
+        <pc:spChg chg="add mod">
+          <ac:chgData name="David Irungu" userId="3570a5346c53ff8c" providerId="LiveId" clId="{B3EF4350-6A02-4366-A4A5-47E00D9EF2BB}" dt="2026-08-22T11:58:10.457" v="826" actId="2710"/>
+          <ac:spMkLst>
+            <pc:docMk/>
+            <pc:sldMk cId="0" sldId="258"/>
+            <ac:spMk id="49" creationId="{ECF4F4C4-1135-7C38-EC9C-12B7E53A47D6}"/>
+          </ac:spMkLst>
+        </pc:spChg>
+        <pc:spChg chg="add mod">
+          <ac:chgData name="David Irungu" userId="3570a5346c53ff8c" providerId="LiveId" clId="{B3EF4350-6A02-4366-A4A5-47E00D9EF2BB}" dt="2026-08-22T11:58:10.457" v="826" actId="2710"/>
+          <ac:spMkLst>
+            <pc:docMk/>
+            <pc:sldMk cId="0" sldId="258"/>
+            <ac:spMk id="51" creationId="{E0FB1D44-5F89-9605-52CB-D7679E1D6344}"/>
+          </ac:spMkLst>
+        </pc:spChg>
+        <pc:spChg chg="add mod">
+          <ac:chgData name="David Irungu" userId="3570a5346c53ff8c" providerId="LiveId" clId="{B3EF4350-6A02-4366-A4A5-47E00D9EF2BB}" dt="2026-08-22T11:58:10.457" v="826" actId="2710"/>
+          <ac:spMkLst>
+            <pc:docMk/>
+            <pc:sldMk cId="0" sldId="258"/>
+            <ac:spMk id="53" creationId="{1F4D2766-5B59-CFB9-AD3B-3C66137A595E}"/>
           </ac:spMkLst>
         </pc:spChg>
         <pc:picChg chg="del">
@@ -322,11 +474,35 @@
           </ac:picMkLst>
         </pc:picChg>
         <pc:picChg chg="del">
+          <ac:chgData name="David Irungu" userId="3570a5346c53ff8c" providerId="LiveId" clId="{B3EF4350-6A02-4366-A4A5-47E00D9EF2BB}" dt="2026-08-22T11:56:35.754" v="806" actId="478"/>
+          <ac:picMkLst>
+            <pc:docMk/>
+            <pc:sldMk cId="0" sldId="258"/>
+            <ac:picMk id="12" creationId="{00000000-0000-0000-0000-000000000000}"/>
+          </ac:picMkLst>
+        </pc:picChg>
+        <pc:picChg chg="del">
           <ac:chgData name="David Irungu" userId="3570a5346c53ff8c" providerId="LiveId" clId="{B3EF4350-6A02-4366-A4A5-47E00D9EF2BB}" dt="2026-08-22T11:18:38.182" v="67" actId="478"/>
           <ac:picMkLst>
             <pc:docMk/>
             <pc:sldMk cId="0" sldId="258"/>
             <ac:picMk id="16" creationId="{00000000-0000-0000-0000-000000000000}"/>
+          </ac:picMkLst>
+        </pc:picChg>
+        <pc:picChg chg="add del">
+          <ac:chgData name="David Irungu" userId="3570a5346c53ff8c" providerId="LiveId" clId="{B3EF4350-6A02-4366-A4A5-47E00D9EF2BB}" dt="2026-08-22T11:56:59.311" v="809" actId="22"/>
+          <ac:picMkLst>
+            <pc:docMk/>
+            <pc:sldMk cId="0" sldId="258"/>
+            <ac:picMk id="25" creationId="{9B59A8D9-0224-7EAF-B27C-D2F9BAC07140}"/>
+          </ac:picMkLst>
+        </pc:picChg>
+        <pc:picChg chg="add del">
+          <ac:chgData name="David Irungu" userId="3570a5346c53ff8c" providerId="LiveId" clId="{B3EF4350-6A02-4366-A4A5-47E00D9EF2BB}" dt="2026-08-22T11:57:18.533" v="811" actId="478"/>
+          <ac:picMkLst>
+            <pc:docMk/>
+            <pc:sldMk cId="0" sldId="258"/>
+            <ac:picMk id="45" creationId="{0333C166-132F-DDA1-31DB-6E2FAA57CDE3}"/>
           </ac:picMkLst>
         </pc:picChg>
       </pc:sldChg>
@@ -606,7 +782,7 @@
         </pc:spChg>
       </pc:sldChg>
       <pc:sldChg chg="addSp delSp modSp mod">
-        <pc:chgData name="David Irungu" userId="3570a5346c53ff8c" providerId="LiveId" clId="{B3EF4350-6A02-4366-A4A5-47E00D9EF2BB}" dt="2026-08-22T11:38:33.795" v="591"/>
+        <pc:chgData name="David Irungu" userId="3570a5346c53ff8c" providerId="LiveId" clId="{B3EF4350-6A02-4366-A4A5-47E00D9EF2BB}" dt="2026-08-22T12:00:29.323" v="853" actId="20577"/>
         <pc:sldMkLst>
           <pc:docMk/>
           <pc:sldMk cId="0" sldId="264"/>
@@ -628,7 +804,7 @@
           </ac:spMkLst>
         </pc:spChg>
         <pc:spChg chg="add del mod">
-          <ac:chgData name="David Irungu" userId="3570a5346c53ff8c" providerId="LiveId" clId="{B3EF4350-6A02-4366-A4A5-47E00D9EF2BB}" dt="2026-08-22T11:38:33.795" v="591"/>
+          <ac:chgData name="David Irungu" userId="3570a5346c53ff8c" providerId="LiveId" clId="{B3EF4350-6A02-4366-A4A5-47E00D9EF2BB}" dt="2026-08-22T12:00:29.323" v="853" actId="20577"/>
           <ac:spMkLst>
             <pc:docMk/>
             <pc:sldMk cId="0" sldId="264"/>
@@ -11050,12 +11226,9 @@
             </a:pPr>
             <a:r>
               <a:rPr lang="en-US" dirty="0">
-                <a:solidFill>
-                  <a:schemeClr val="bg1"/>
-                </a:solidFill>
-                <a:latin typeface="Calibri" pitchFamily="34" charset="0"/>
-                <a:ea typeface="Calibri" pitchFamily="34" charset="-122"/>
-                <a:cs typeface="Calibri" pitchFamily="34" charset="-120"/>
+                <a:latin typeface="Calibri" panose="020F0502020204030204" pitchFamily="34" charset="0"/>
+                <a:ea typeface="Calibri" panose="020F0502020204030204" pitchFamily="34" charset="0"/>
+                <a:cs typeface="Calibri" panose="020F0502020204030204" pitchFamily="34" charset="0"/>
               </a:rPr>
               <a:t>David Gathage  - 223405</a:t>
             </a:r>
@@ -11066,25 +11239,25 @@
             </a:pPr>
             <a:r>
               <a:rPr lang="en-US" dirty="0">
-                <a:solidFill>
-                  <a:schemeClr val="bg1"/>
-                </a:solidFill>
+                <a:latin typeface="Calibri" panose="020F0502020204030204" pitchFamily="34" charset="0"/>
+                <a:ea typeface="Calibri" panose="020F0502020204030204" pitchFamily="34" charset="0"/>
+                <a:cs typeface="Calibri" panose="020F0502020204030204" pitchFamily="34" charset="0"/>
               </a:rPr>
               <a:t>Aicha </a:t>
             </a:r>
             <a:r>
               <a:rPr lang="en-US" dirty="0" err="1">
-                <a:solidFill>
-                  <a:schemeClr val="bg1"/>
-                </a:solidFill>
+                <a:latin typeface="Calibri" panose="020F0502020204030204" pitchFamily="34" charset="0"/>
+                <a:ea typeface="Calibri" panose="020F0502020204030204" pitchFamily="34" charset="0"/>
+                <a:cs typeface="Calibri" panose="020F0502020204030204" pitchFamily="34" charset="0"/>
               </a:rPr>
               <a:t>Zindamoyen</a:t>
             </a:r>
             <a:r>
               <a:rPr lang="en-US" dirty="0">
-                <a:solidFill>
-                  <a:schemeClr val="bg1"/>
-                </a:solidFill>
+                <a:latin typeface="Calibri" panose="020F0502020204030204" pitchFamily="34" charset="0"/>
+                <a:ea typeface="Calibri" panose="020F0502020204030204" pitchFamily="34" charset="0"/>
+                <a:cs typeface="Calibri" panose="020F0502020204030204" pitchFamily="34" charset="0"/>
               </a:rPr>
               <a:t> - 134141</a:t>
             </a:r>
@@ -12124,14 +12297,20 @@
       </p:sp>
       <p:sp>
         <p:nvSpPr>
-          <p:cNvPr id="5" name="Text 2"/>
+          <p:cNvPr id="35" name="Text 0">
+            <a:extLst>
+              <a:ext uri="{FF2B5EF4-FFF2-40B4-BE49-F238E27FC236}">
+                <a16:creationId xmlns:a16="http://schemas.microsoft.com/office/drawing/2014/main" id="{59F01768-461B-702D-7A36-27C4BE1FB068}"/>
+              </a:ext>
+            </a:extLst>
+          </p:cNvPr>
           <p:cNvSpPr/>
           <p:nvPr/>
         </p:nvSpPr>
         <p:spPr>
           <a:xfrm>
-            <a:off x="787481" y="1417320"/>
-            <a:ext cx="10058400" cy="329184"/>
+            <a:off x="640080" y="457200"/>
+            <a:ext cx="7315200" cy="731520"/>
           </a:xfrm>
           <a:prstGeom prst="rect">
             <a:avLst/>
@@ -12147,7 +12326,55 @@
               <a:buNone/>
             </a:pPr>
             <a:r>
-              <a:rPr lang="en-US" sz="1550" b="1" dirty="0">
+              <a:rPr lang="en-US" sz="3400" b="1" dirty="0">
+                <a:solidFill>
+                  <a:srgbClr val="1E2761"/>
+                </a:solidFill>
+                <a:latin typeface="Cambria" pitchFamily="34" charset="0"/>
+                <a:ea typeface="Cambria" pitchFamily="34" charset="-122"/>
+                <a:cs typeface="Cambria" pitchFamily="34" charset="-120"/>
+              </a:rPr>
+              <a:t>Related works</a:t>
+            </a:r>
+            <a:endParaRPr lang="en-US" sz="3400" dirty="0"/>
+          </a:p>
+        </p:txBody>
+      </p:sp>
+      <p:sp>
+        <p:nvSpPr>
+          <p:cNvPr id="37" name="Text 2">
+            <a:extLst>
+              <a:ext uri="{FF2B5EF4-FFF2-40B4-BE49-F238E27FC236}">
+                <a16:creationId xmlns:a16="http://schemas.microsoft.com/office/drawing/2014/main" id="{67FB1887-B6CE-4990-FE3D-D4717C05961F}"/>
+              </a:ext>
+            </a:extLst>
+          </p:cNvPr>
+          <p:cNvSpPr/>
+          <p:nvPr/>
+        </p:nvSpPr>
+        <p:spPr>
+          <a:xfrm>
+            <a:off x="787481" y="1417320"/>
+            <a:ext cx="10058400" cy="329184"/>
+          </a:xfrm>
+          <a:prstGeom prst="rect">
+            <a:avLst/>
+          </a:prstGeom>
+          <a:noFill/>
+          <a:ln/>
+        </p:spPr>
+        <p:txBody>
+          <a:bodyPr wrap="square" lIns="0" tIns="0" rIns="0" bIns="0" rtlCol="0" anchor="ctr"/>
+          <a:lstStyle/>
+          <a:p>
+            <a:pPr marL="0" indent="0">
+              <a:lnSpc>
+                <a:spcPct val="150000"/>
+              </a:lnSpc>
+              <a:buNone/>
+            </a:pPr>
+            <a:r>
+              <a:rPr lang="en-US" sz="1400" b="1" dirty="0">
                 <a:solidFill>
                   <a:srgbClr val="1E2761"/>
                 </a:solidFill>
@@ -12158,7 +12385,7 @@
               <a:t>1. </a:t>
             </a:r>
             <a:r>
-              <a:rPr lang="en-US" sz="1550" b="1" dirty="0" err="1">
+              <a:rPr lang="en-US" sz="1400" b="1" dirty="0" err="1">
                 <a:solidFill>
                   <a:srgbClr val="1E2761"/>
                 </a:solidFill>
@@ -12169,7 +12396,7 @@
               <a:t>Demirguc</a:t>
             </a:r>
             <a:r>
-              <a:rPr lang="en-US" sz="1550" b="1" dirty="0">
+              <a:rPr lang="en-US" sz="1400" b="1" dirty="0">
                 <a:solidFill>
                   <a:srgbClr val="1E2761"/>
                 </a:solidFill>
@@ -12177,15 +12404,21 @@
                 <a:ea typeface="Calibri" pitchFamily="34" charset="-122"/>
                 <a:cs typeface="Calibri" pitchFamily="34" charset="-120"/>
               </a:rPr>
-              <a:t>-Kunt et al. (2022), The Global Findex Database 2021, World Bank</a:t>
-            </a:r>
-            <a:endParaRPr lang="en-US" sz="1550" dirty="0"/>
-          </a:p>
-        </p:txBody>
-      </p:sp>
-      <p:sp>
-        <p:nvSpPr>
-          <p:cNvPr id="6" name="Text 3"/>
+              <a:t>-Kunt et al. (2022) - The Global Findex Database 2021, World Bank</a:t>
+            </a:r>
+            <a:endParaRPr lang="en-US" sz="1400" dirty="0"/>
+          </a:p>
+        </p:txBody>
+      </p:sp>
+      <p:sp>
+        <p:nvSpPr>
+          <p:cNvPr id="39" name="Text 3">
+            <a:extLst>
+              <a:ext uri="{FF2B5EF4-FFF2-40B4-BE49-F238E27FC236}">
+                <a16:creationId xmlns:a16="http://schemas.microsoft.com/office/drawing/2014/main" id="{68F9653F-6FE0-A3A2-6F81-C75031692EF3}"/>
+              </a:ext>
+            </a:extLst>
+          </p:cNvPr>
           <p:cNvSpPr/>
           <p:nvPr/>
         </p:nvSpPr>
@@ -12205,10 +12438,13 @@
           <a:lstStyle/>
           <a:p>
             <a:pPr marL="0" indent="0">
+              <a:lnSpc>
+                <a:spcPct val="150000"/>
+              </a:lnSpc>
               <a:buNone/>
             </a:pPr>
             <a:r>
-              <a:rPr lang="en-US" sz="1250" dirty="0">
+              <a:rPr lang="en-US" sz="1200" dirty="0">
                 <a:solidFill>
                   <a:srgbClr val="0B0B0B"/>
                 </a:solidFill>
@@ -12218,13 +12454,19 @@
               </a:rPr>
               <a:t>Documents account ownership worldwide; in sub-Saharan Africa just over half of adults hold an account, with mobile money driving most recent gains.</a:t>
             </a:r>
-            <a:endParaRPr lang="en-US" sz="1250" dirty="0"/>
-          </a:p>
-        </p:txBody>
-      </p:sp>
-      <p:sp>
-        <p:nvSpPr>
-          <p:cNvPr id="9" name="Text 5"/>
+            <a:endParaRPr lang="en-US" sz="1200" dirty="0"/>
+          </a:p>
+        </p:txBody>
+      </p:sp>
+      <p:sp>
+        <p:nvSpPr>
+          <p:cNvPr id="41" name="Text 5">
+            <a:extLst>
+              <a:ext uri="{FF2B5EF4-FFF2-40B4-BE49-F238E27FC236}">
+                <a16:creationId xmlns:a16="http://schemas.microsoft.com/office/drawing/2014/main" id="{88D82258-D096-E8D9-D1BE-50C9BD7D302D}"/>
+              </a:ext>
+            </a:extLst>
+          </p:cNvPr>
           <p:cNvSpPr/>
           <p:nvPr/>
         </p:nvSpPr>
@@ -12244,10 +12486,13 @@
           <a:lstStyle/>
           <a:p>
             <a:pPr marL="0" indent="0">
+              <a:lnSpc>
+                <a:spcPct val="150000"/>
+              </a:lnSpc>
               <a:buNone/>
             </a:pPr>
             <a:r>
-              <a:rPr lang="en-US" sz="1550" b="1" dirty="0">
+              <a:rPr lang="en-US" sz="1400" b="1" dirty="0">
                 <a:solidFill>
                   <a:srgbClr val="1E2761"/>
                 </a:solidFill>
@@ -12257,13 +12502,19 @@
               </a:rPr>
               <a:t>2. Suri, T., &amp; Jack, W. (2016) - The long-run poverty and gender impacts of mobile money</a:t>
             </a:r>
-            <a:endParaRPr lang="en-US" sz="1550" dirty="0"/>
-          </a:p>
-        </p:txBody>
-      </p:sp>
-      <p:sp>
-        <p:nvSpPr>
-          <p:cNvPr id="10" name="Text 6"/>
+            <a:endParaRPr lang="en-US" sz="1400" dirty="0"/>
+          </a:p>
+        </p:txBody>
+      </p:sp>
+      <p:sp>
+        <p:nvSpPr>
+          <p:cNvPr id="43" name="Text 6">
+            <a:extLst>
+              <a:ext uri="{FF2B5EF4-FFF2-40B4-BE49-F238E27FC236}">
+                <a16:creationId xmlns:a16="http://schemas.microsoft.com/office/drawing/2014/main" id="{A9B4A275-5C19-B13F-5363-D964C8646D51}"/>
+              </a:ext>
+            </a:extLst>
+          </p:cNvPr>
           <p:cNvSpPr/>
           <p:nvPr/>
         </p:nvSpPr>
@@ -12283,10 +12534,13 @@
           <a:lstStyle/>
           <a:p>
             <a:pPr marL="0" indent="0">
+              <a:lnSpc>
+                <a:spcPct val="150000"/>
+              </a:lnSpc>
               <a:buNone/>
             </a:pPr>
             <a:r>
-              <a:rPr lang="en-US" sz="1250" dirty="0">
+              <a:rPr lang="en-US" sz="1200" dirty="0">
                 <a:solidFill>
                   <a:srgbClr val="0B0B0B"/>
                 </a:solidFill>
@@ -12296,37 +12550,19 @@
               </a:rPr>
               <a:t>Access to M-Pesa mobile money lifted an estimated 2% of Kenyan households out of extreme poverty. A causal case for expanding financial access.</a:t>
             </a:r>
-            <a:endParaRPr lang="en-US" sz="1250" dirty="0"/>
-          </a:p>
-        </p:txBody>
-      </p:sp>
-      <p:pic>
-        <p:nvPicPr>
-          <p:cNvPr id="12" name="Image 2" descr="icons/trophy.png"/>
-          <p:cNvPicPr>
-            <a:picLocks noChangeAspect="1"/>
-          </p:cNvPicPr>
-          <p:nvPr/>
-        </p:nvPicPr>
-        <p:blipFill>
-          <a:blip r:embed="rId3"/>
-          <a:stretch>
-            <a:fillRect/>
-          </a:stretch>
-        </p:blipFill>
-        <p:spPr>
-          <a:xfrm>
-            <a:off x="787481" y="4216481"/>
-            <a:ext cx="272125" cy="272125"/>
-          </a:xfrm>
-          <a:prstGeom prst="rect">
-            <a:avLst/>
-          </a:prstGeom>
-        </p:spPr>
-      </p:pic>
-      <p:sp>
-        <p:nvSpPr>
-          <p:cNvPr id="13" name="Text 8"/>
+            <a:endParaRPr lang="en-US" sz="1200" dirty="0"/>
+          </a:p>
+        </p:txBody>
+      </p:sp>
+      <p:sp>
+        <p:nvSpPr>
+          <p:cNvPr id="47" name="Text 8">
+            <a:extLst>
+              <a:ext uri="{FF2B5EF4-FFF2-40B4-BE49-F238E27FC236}">
+                <a16:creationId xmlns:a16="http://schemas.microsoft.com/office/drawing/2014/main" id="{E01EBB16-7DC1-2A20-BD05-1CDD29D7B41D}"/>
+              </a:ext>
+            </a:extLst>
+          </p:cNvPr>
           <p:cNvSpPr/>
           <p:nvPr/>
         </p:nvSpPr>
@@ -12346,10 +12582,13 @@
           <a:lstStyle/>
           <a:p>
             <a:pPr marL="0" indent="0">
+              <a:lnSpc>
+                <a:spcPct val="150000"/>
+              </a:lnSpc>
               <a:buNone/>
             </a:pPr>
             <a:r>
-              <a:rPr lang="en-US" sz="1550" b="1" dirty="0">
+              <a:rPr lang="en-US" sz="1400" b="1" dirty="0">
                 <a:solidFill>
                   <a:srgbClr val="1E2761"/>
                 </a:solidFill>
@@ -12360,7 +12599,7 @@
               <a:t>3. Dataset's origin: </a:t>
             </a:r>
             <a:r>
-              <a:rPr lang="it-IT" sz="1550" b="1" dirty="0">
+              <a:rPr lang="it-IT" sz="1400" b="1" dirty="0">
                 <a:solidFill>
                   <a:srgbClr val="1E2761"/>
                 </a:solidFill>
@@ -12368,10 +12607,10 @@
                 <a:ea typeface="Calibri" pitchFamily="34" charset="-122"/>
                 <a:cs typeface="Calibri" pitchFamily="34" charset="-120"/>
               </a:rPr>
-              <a:t>Zindi (2019), 'Financial Inclusion in Africa' challenge.</a:t>
-            </a:r>
-            <a:r>
-              <a:rPr lang="en-US" sz="1550" b="1" dirty="0">
+              <a:t>Zindi (2019) - 'Financial Inclusion in Africa' challenge.</a:t>
+            </a:r>
+            <a:r>
+              <a:rPr lang="en-US" sz="1400" b="1" dirty="0">
                 <a:solidFill>
                   <a:srgbClr val="1E2761"/>
                 </a:solidFill>
@@ -12381,13 +12620,19 @@
               </a:rPr>
               <a:t> </a:t>
             </a:r>
-            <a:endParaRPr lang="en-US" sz="1550" dirty="0"/>
-          </a:p>
-        </p:txBody>
-      </p:sp>
-      <p:sp>
-        <p:nvSpPr>
-          <p:cNvPr id="14" name="Text 9"/>
+            <a:endParaRPr lang="en-US" sz="1400" dirty="0"/>
+          </a:p>
+        </p:txBody>
+      </p:sp>
+      <p:sp>
+        <p:nvSpPr>
+          <p:cNvPr id="49" name="Text 9">
+            <a:extLst>
+              <a:ext uri="{FF2B5EF4-FFF2-40B4-BE49-F238E27FC236}">
+                <a16:creationId xmlns:a16="http://schemas.microsoft.com/office/drawing/2014/main" id="{ECF4F4C4-1135-7C38-EC9C-12B7E53A47D6}"/>
+              </a:ext>
+            </a:extLst>
+          </p:cNvPr>
           <p:cNvSpPr/>
           <p:nvPr/>
         </p:nvSpPr>
@@ -12407,10 +12652,13 @@
           <a:lstStyle/>
           <a:p>
             <a:pPr marL="0" indent="0">
+              <a:lnSpc>
+                <a:spcPct val="150000"/>
+              </a:lnSpc>
               <a:buNone/>
             </a:pPr>
             <a:r>
-              <a:rPr lang="en-US" sz="1250" dirty="0">
+              <a:rPr lang="en-US" sz="1200" dirty="0">
                 <a:solidFill>
                   <a:srgbClr val="0B0B0B"/>
                 </a:solidFill>
@@ -12420,13 +12668,19 @@
               </a:rPr>
               <a:t>Released the FinScope/FinAccess survey data used here (2016-2018) and framed bank-account prediction as a supervised learning task.</a:t>
             </a:r>
-            <a:endParaRPr lang="en-US" sz="1250" dirty="0"/>
-          </a:p>
-        </p:txBody>
-      </p:sp>
-      <p:sp>
-        <p:nvSpPr>
-          <p:cNvPr id="17" name="Text 11"/>
+            <a:endParaRPr lang="en-US" sz="1200" dirty="0"/>
+          </a:p>
+        </p:txBody>
+      </p:sp>
+      <p:sp>
+        <p:nvSpPr>
+          <p:cNvPr id="51" name="Text 11">
+            <a:extLst>
+              <a:ext uri="{FF2B5EF4-FFF2-40B4-BE49-F238E27FC236}">
+                <a16:creationId xmlns:a16="http://schemas.microsoft.com/office/drawing/2014/main" id="{E0FB1D44-5F89-9605-52CB-D7679E1D6344}"/>
+              </a:ext>
+            </a:extLst>
+          </p:cNvPr>
           <p:cNvSpPr/>
           <p:nvPr/>
         </p:nvSpPr>
@@ -12446,10 +12700,13 @@
           <a:lstStyle/>
           <a:p>
             <a:pPr marL="0" indent="0">
+              <a:lnSpc>
+                <a:spcPct val="150000"/>
+              </a:lnSpc>
               <a:buNone/>
             </a:pPr>
             <a:r>
-              <a:rPr lang="en-US" sz="1550" b="1" dirty="0">
+              <a:rPr lang="en-US" sz="1400" b="1" dirty="0">
                 <a:solidFill>
                   <a:srgbClr val="1E2761"/>
                 </a:solidFill>
@@ -12457,15 +12714,21 @@
                 <a:ea typeface="Calibri" pitchFamily="34" charset="-122"/>
                 <a:cs typeface="Calibri" pitchFamily="34" charset="-120"/>
               </a:rPr>
-              <a:t>4. Comparing classic classifiers, the IJRASET 2024 comparative analysis</a:t>
-            </a:r>
-            <a:endParaRPr lang="en-US" sz="1550" dirty="0"/>
-          </a:p>
-        </p:txBody>
-      </p:sp>
-      <p:sp>
-        <p:nvSpPr>
-          <p:cNvPr id="18" name="Text 12"/>
+              <a:t>4. Comparing classic classifiers - The IJRASET 2024 comparative analysis</a:t>
+            </a:r>
+            <a:endParaRPr lang="en-US" sz="1400" dirty="0"/>
+          </a:p>
+        </p:txBody>
+      </p:sp>
+      <p:sp>
+        <p:nvSpPr>
+          <p:cNvPr id="53" name="Text 12">
+            <a:extLst>
+              <a:ext uri="{FF2B5EF4-FFF2-40B4-BE49-F238E27FC236}">
+                <a16:creationId xmlns:a16="http://schemas.microsoft.com/office/drawing/2014/main" id="{1F4D2766-5B59-CFB9-AD3B-3C66137A595E}"/>
+              </a:ext>
+            </a:extLst>
+          </p:cNvPr>
           <p:cNvSpPr/>
           <p:nvPr/>
         </p:nvSpPr>
@@ -12485,10 +12748,13 @@
           <a:lstStyle/>
           <a:p>
             <a:pPr marL="0" indent="0">
+              <a:lnSpc>
+                <a:spcPct val="150000"/>
+              </a:lnSpc>
               <a:buNone/>
             </a:pPr>
             <a:r>
-              <a:rPr lang="en-US" sz="1250" dirty="0">
+              <a:rPr lang="en-US" sz="1200" dirty="0">
                 <a:solidFill>
                   <a:srgbClr val="0B0B0B"/>
                 </a:solidFill>
@@ -12498,43 +12764,7 @@
               </a:rPr>
               <a:t>Comparative studies of KNN, SVM, Decision Trees and neural networks on financial and credit data consistently find that the winner is dataset-dependent. That is the case for running a controlled comparison on this dataset.</a:t>
             </a:r>
-            <a:endParaRPr lang="en-US" sz="1250" dirty="0"/>
-          </a:p>
-        </p:txBody>
-      </p:sp>
-      <p:sp>
-        <p:nvSpPr>
-          <p:cNvPr id="20" name="TextBox 19">
-            <a:extLst>
-              <a:ext uri="{FF2B5EF4-FFF2-40B4-BE49-F238E27FC236}">
-                <a16:creationId xmlns:a16="http://schemas.microsoft.com/office/drawing/2014/main" id="{D484B50B-0035-4F16-CA8A-B737DC1E46F7}"/>
-              </a:ext>
-            </a:extLst>
-          </p:cNvPr>
-          <p:cNvSpPr txBox="1"/>
-          <p:nvPr/>
-        </p:nvSpPr>
-        <p:spPr>
-          <a:xfrm>
-            <a:off x="3047281" y="3167390"/>
-            <a:ext cx="6094562" cy="523220"/>
-          </a:xfrm>
-          <a:prstGeom prst="rect">
-            <a:avLst/>
-          </a:prstGeom>
-          <a:noFill/>
-        </p:spPr>
-        <p:txBody>
-          <a:bodyPr wrap="square">
-            <a:spAutoFit/>
-          </a:bodyPr>
-          <a:lstStyle/>
-          <a:p>
-            <a:r>
-              <a:rPr lang="en-GB" sz="1400" dirty="0"/>
-              <a:t>Suri, T., &amp; Jack, W. (2016). The long-run poverty and gender impacts of mobile money</a:t>
-            </a:r>
-            <a:endParaRPr lang="en-GB" dirty="0"/>
+            <a:endParaRPr lang="en-US" sz="1200" dirty="0"/>
           </a:p>
         </p:txBody>
       </p:sp>
@@ -17674,57 +17904,29 @@
           <a:p>
             <a:pPr marL="342900" indent="-342900">
               <a:lnSpc>
-                <a:spcPct val="200000"/>
+                <a:spcPct val="150000"/>
               </a:lnSpc>
               <a:buAutoNum type="arabicPeriod"/>
             </a:pPr>
             <a:r>
-              <a:rPr lang="en-US" b="1" dirty="0">
-                <a:solidFill>
-                  <a:srgbClr val="CADCFC"/>
-                </a:solidFill>
+              <a:rPr lang="en-US" dirty="0">
                 <a:latin typeface="Calibri" pitchFamily="34" charset="0"/>
                 <a:ea typeface="Calibri" pitchFamily="34" charset="-122"/>
                 <a:cs typeface="Calibri" pitchFamily="34" charset="-120"/>
               </a:rPr>
-              <a:t>SVM narrowly wins on accuracy -  </a:t>
-            </a:r>
-            <a:r>
-              <a:rPr lang="en-US" dirty="0">
-                <a:solidFill>
-                  <a:srgbClr val="FFFFFF"/>
-                </a:solidFill>
-                <a:latin typeface="Calibri" pitchFamily="34" charset="0"/>
-                <a:ea typeface="Calibri" pitchFamily="34" charset="-122"/>
-                <a:cs typeface="Calibri" pitchFamily="34" charset="-120"/>
-              </a:rPr>
-              <a:t>Best 2-fold CV accuracy (88.8%), with ANN (88.6%) statistically comes second at a fraction of the training cost.</a:t>
+              <a:t>SVM has the bet 2-fold CV accuracy (88.8%), with ANN (88.6%) statistically comes second at a fraction of the training cost.</a:t>
             </a:r>
           </a:p>
           <a:p>
             <a:pPr marL="342900" indent="-342900">
               <a:lnSpc>
-                <a:spcPct val="200000"/>
+                <a:spcPct val="150000"/>
               </a:lnSpc>
               <a:buFontTx/>
               <a:buAutoNum type="arabicPeriod"/>
             </a:pPr>
             <a:r>
-              <a:rPr lang="en-US" b="1" dirty="0">
-                <a:solidFill>
-                  <a:srgbClr val="CADCFC"/>
-                </a:solidFill>
-                <a:latin typeface="Calibri" pitchFamily="34" charset="0"/>
-                <a:ea typeface="Calibri" pitchFamily="34" charset="-122"/>
-                <a:cs typeface="Calibri" pitchFamily="34" charset="-120"/>
-              </a:rPr>
-              <a:t>Validation design is not a detail.  </a:t>
-            </a:r>
-            <a:r>
               <a:rPr lang="en-US" dirty="0">
-                <a:solidFill>
-                  <a:srgbClr val="FFFFFF"/>
-                </a:solidFill>
                 <a:latin typeface="Calibri" pitchFamily="34" charset="0"/>
                 <a:ea typeface="Calibri" pitchFamily="34" charset="-122"/>
                 <a:cs typeface="Calibri" pitchFamily="34" charset="-120"/>
@@ -17735,63 +17937,51 @@
           <a:p>
             <a:pPr marL="342900" indent="-342900">
               <a:lnSpc>
-                <a:spcPct val="200000"/>
+                <a:spcPct val="150000"/>
               </a:lnSpc>
               <a:buFontTx/>
               <a:buAutoNum type="arabicPeriod"/>
             </a:pPr>
             <a:r>
-              <a:rPr lang="en-US" b="1" dirty="0">
-                <a:solidFill>
-                  <a:srgbClr val="CADCFC"/>
-                </a:solidFill>
+              <a:rPr lang="en-US" dirty="0">
                 <a:latin typeface="Calibri" pitchFamily="34" charset="0"/>
                 <a:ea typeface="Calibri" pitchFamily="34" charset="-122"/>
                 <a:cs typeface="Calibri" pitchFamily="34" charset="-120"/>
               </a:rPr>
-              <a:t>Accuracy alone would be a misleading metric.  </a:t>
-            </a:r>
-            <a:r>
-              <a:rPr lang="en-US" dirty="0">
-                <a:solidFill>
-                  <a:srgbClr val="FFFFFF"/>
-                </a:solidFill>
+              <a:t>Accuracy </a:t>
+            </a:r>
+            <a:r>
+              <a:rPr lang="en-US">
                 <a:latin typeface="Calibri" pitchFamily="34" charset="0"/>
                 <a:ea typeface="Calibri" pitchFamily="34" charset="-122"/>
                 <a:cs typeface="Calibri" pitchFamily="34" charset="-120"/>
               </a:rPr>
-              <a:t>With 86% of respondents unbanked, the interesting signal is minority-class recall - where every model still has ample room to improve.</a:t>
+              <a:t>alone is </a:t>
+            </a:r>
+            <a:r>
+              <a:rPr lang="en-US" dirty="0">
+                <a:latin typeface="Calibri" pitchFamily="34" charset="0"/>
+                <a:ea typeface="Calibri" pitchFamily="34" charset="-122"/>
+                <a:cs typeface="Calibri" pitchFamily="34" charset="-120"/>
+              </a:rPr>
+              <a:t>a misleading metric.  With 86% of respondents unbanked, the interesting signal is minority-class recall - where every model still has ample room to improve.</a:t>
             </a:r>
           </a:p>
           <a:p>
             <a:pPr marL="342900" indent="-342900">
               <a:lnSpc>
-                <a:spcPct val="200000"/>
+                <a:spcPct val="150000"/>
               </a:lnSpc>
               <a:buFontTx/>
               <a:buAutoNum type="arabicPeriod"/>
             </a:pPr>
             <a:r>
-              <a:rPr lang="en-US" b="1" dirty="0">
-                <a:solidFill>
-                  <a:srgbClr val="CADCFC"/>
-                </a:solidFill>
+              <a:rPr lang="en-US" dirty="0">
                 <a:latin typeface="Calibri" pitchFamily="34" charset="0"/>
                 <a:ea typeface="Calibri" pitchFamily="34" charset="-122"/>
                 <a:cs typeface="Calibri" pitchFamily="34" charset="-120"/>
               </a:rPr>
-              <a:t>Practical recommendation.  </a:t>
-            </a:r>
-            <a:r>
-              <a:rPr lang="en-US" dirty="0">
-                <a:solidFill>
-                  <a:srgbClr val="FFFFFF"/>
-                </a:solidFill>
-                <a:latin typeface="Calibri" pitchFamily="34" charset="0"/>
-                <a:ea typeface="Calibri" pitchFamily="34" charset="-122"/>
-                <a:cs typeface="Calibri" pitchFamily="34" charset="-120"/>
-              </a:rPr>
-              <a:t>For this dataset: ANN or SVM with class rebalancing as the next step; the Decision Tree where interpretability for policymakers outweighs the last point of accuracy.</a:t>
+              <a:t>Recommendation:  For this dataset: ANN or SVM with class rebalancing as the next step; the Decision Tree where interpretability for policymakers outweighs the last point of accuracy.</a:t>
             </a:r>
             <a:endParaRPr lang="en-US" dirty="0"/>
           </a:p>

--- a/Report/Mini project report.pptx
+++ b/Report/Mini project report.pptx
@@ -137,7 +137,7 @@
   <pc:docChgLst>
     <pc:chgData name="David Irungu" userId="3570a5346c53ff8c" providerId="LiveId" clId="{B3EF4350-6A02-4366-A4A5-47E00D9EF2BB}"/>
     <pc:docChg chg="undo custSel addSld modSld">
-      <pc:chgData name="David Irungu" userId="3570a5346c53ff8c" providerId="LiveId" clId="{B3EF4350-6A02-4366-A4A5-47E00D9EF2BB}" dt="2026-08-22T12:00:29.323" v="853" actId="20577"/>
+      <pc:chgData name="David Irungu" userId="3570a5346c53ff8c" providerId="LiveId" clId="{B3EF4350-6A02-4366-A4A5-47E00D9EF2BB}" dt="2026-08-22T12:53:19.731" v="861" actId="20577"/>
       <pc:docMkLst>
         <pc:docMk/>
       </pc:docMkLst>
@@ -165,13 +165,13 @@
         </pc:spChg>
       </pc:sldChg>
       <pc:sldChg chg="delSp modSp mod">
-        <pc:chgData name="David Irungu" userId="3570a5346c53ff8c" providerId="LiveId" clId="{B3EF4350-6A02-4366-A4A5-47E00D9EF2BB}" dt="2026-08-22T11:46:42.683" v="736" actId="20577"/>
+        <pc:chgData name="David Irungu" userId="3570a5346c53ff8c" providerId="LiveId" clId="{B3EF4350-6A02-4366-A4A5-47E00D9EF2BB}" dt="2026-08-22T12:50:46.303" v="860" actId="20577"/>
         <pc:sldMkLst>
           <pc:docMk/>
           <pc:sldMk cId="0" sldId="257"/>
         </pc:sldMkLst>
         <pc:spChg chg="mod">
-          <ac:chgData name="David Irungu" userId="3570a5346c53ff8c" providerId="LiveId" clId="{B3EF4350-6A02-4366-A4A5-47E00D9EF2BB}" dt="2026-08-22T11:46:42.683" v="736" actId="20577"/>
+          <ac:chgData name="David Irungu" userId="3570a5346c53ff8c" providerId="LiveId" clId="{B3EF4350-6A02-4366-A4A5-47E00D9EF2BB}" dt="2026-08-22T12:50:46.303" v="860" actId="20577"/>
           <ac:spMkLst>
             <pc:docMk/>
             <pc:sldMk cId="0" sldId="257"/>
@@ -657,7 +657,7 @@
         </pc:spChg>
       </pc:sldChg>
       <pc:sldChg chg="modSp mod">
-        <pc:chgData name="David Irungu" userId="3570a5346c53ff8c" providerId="LiveId" clId="{B3EF4350-6A02-4366-A4A5-47E00D9EF2BB}" dt="2026-08-22T11:28:30.262" v="339" actId="1076"/>
+        <pc:chgData name="David Irungu" userId="3570a5346c53ff8c" providerId="LiveId" clId="{B3EF4350-6A02-4366-A4A5-47E00D9EF2BB}" dt="2026-08-22T12:53:19.731" v="861" actId="20577"/>
         <pc:sldMkLst>
           <pc:docMk/>
           <pc:sldMk cId="0" sldId="261"/>
@@ -679,7 +679,7 @@
           </ac:spMkLst>
         </pc:spChg>
         <pc:spChg chg="mod">
-          <ac:chgData name="David Irungu" userId="3570a5346c53ff8c" providerId="LiveId" clId="{B3EF4350-6A02-4366-A4A5-47E00D9EF2BB}" dt="2026-08-22T11:28:30.262" v="339" actId="1076"/>
+          <ac:chgData name="David Irungu" userId="3570a5346c53ff8c" providerId="LiveId" clId="{B3EF4350-6A02-4366-A4A5-47E00D9EF2BB}" dt="2026-08-22T12:53:19.731" v="861" actId="20577"/>
           <ac:spMkLst>
             <pc:docMk/>
             <pc:sldMk cId="0" sldId="261"/>
@@ -11709,7 +11709,7 @@
               <a:t>A bank account lets people save safely, borrow, insure against risk and receive payments. Across sub-Saharan Africa, only about half of adults hold any account, and far fewer hold a formal bank account (</a:t>
             </a:r>
             <a:r>
-              <a:rPr lang="fi-FI" sz="1550" dirty="0">
+              <a:rPr lang="nl-NL" sz="1550" dirty="0">
                 <a:solidFill>
                   <a:srgbClr val="0B0B0B"/>
                 </a:solidFill>
@@ -11717,7 +11717,18 @@
                 <a:ea typeface="Calibri" pitchFamily="34" charset="-122"/>
                 <a:cs typeface="Calibri" pitchFamily="34" charset="-120"/>
               </a:rPr>
-              <a:t>Suri T., 2016)</a:t>
+              <a:t>Demirguc-Kunt et al, 2022</a:t>
+            </a:r>
+            <a:r>
+              <a:rPr lang="fi-FI" sz="1550" dirty="0">
+                <a:solidFill>
+                  <a:srgbClr val="0B0B0B"/>
+                </a:solidFill>
+                <a:latin typeface="Calibri" pitchFamily="34" charset="0"/>
+                <a:ea typeface="Calibri" pitchFamily="34" charset="-122"/>
+                <a:cs typeface="Calibri" pitchFamily="34" charset="-120"/>
+              </a:rPr>
+              <a:t>)</a:t>
             </a:r>
             <a:r>
               <a:rPr lang="en-US" sz="1550" dirty="0">
@@ -14603,7 +14614,7 @@
                 <a:ea typeface="Calibri" pitchFamily="34" charset="-122"/>
                 <a:cs typeface="Calibri" pitchFamily="34" charset="-120"/>
               </a:rPr>
-              <a:t>Always answering “No account” scores 85.9%; All 4 models beats the benchmark, but by at most 2.9 points.</a:t>
+              <a:t>Always answering “No account” scores 85.9%; All 4 models beat the benchmark, but by at most 2.9 points.</a:t>
             </a:r>
             <a:endParaRPr lang="en-US" sz="1250" dirty="0"/>
           </a:p>

--- a/Report/Mini project report.pptx
+++ b/Report/Mini project report.pptx
@@ -1130,8 +1130,7 @@
           <a:lstStyle/>
           <a:p>
             <a:r>
-              <a:rPr lang="en-US" dirty="0"/>
-              <a:t>Binary classification task on survey data from Kenya, Rwanda, Tanzania and Uganda. Four classic algorithms are compared under an identical protocol: same preprocessing, same 2-fold stratified cross-validation.</a:t>
+              <a:t>Binary classification task on survey data from Kenya, Rwanda, Tanzania and Uganda. Five classic algorithms are compared under an identical protocol: same preprocessing, same 2-fold stratified cross-validation.</a:t>
             </a:r>
           </a:p>
         </p:txBody>
@@ -1415,8 +1414,7 @@
           <a:lstStyle/>
           <a:p>
             <a:r>
-              <a:rPr lang="en-US" dirty="0"/>
-              <a:t>Two strands of prior work: (1) financial-inclusion research establishing the problem's importance and its measurement; (2) ML literature comparing these same four algorithm families, which finds no universal winner - hence this experiment.</a:t>
+              <a:t>Two strands of prior work: (1) financial-inclusion research establishing the problem's importance and its measurement; (2) ML literature comparing these same five algorithm families, which finds no universal winner - hence this experiment.</a:t>
             </a:r>
           </a:p>
         </p:txBody>
@@ -1589,8 +1587,7 @@
           <a:lstStyle/>
           <a:p>
             <a:r>
-              <a:rPr lang="en-US" dirty="0"/>
-              <a:t>One card per algorithm with its key settings. Class weighting was deliberately not used on the tree and SVM because KNN and the ANN have no equivalent - keeping the comparison fair.</a:t>
+              <a:t>One card per algorithm (five in total) with its key settings. Class weighting was deliberately not used on the tree and SVM because KNN and the ANN have no equivalent - keeping the comparison fair.</a:t>
             </a:r>
           </a:p>
         </p:txBody>
@@ -11144,7 +11141,7 @@
                 <a:ea typeface="Calibri" pitchFamily="34" charset="-122"/>
                 <a:cs typeface="Calibri" pitchFamily="34" charset="-120"/>
               </a:rPr>
-              <a:t>Comparing KNN, Decision Tree, ANN and SVM classifiers with 2-fold cross-validation</a:t>
+              <a:t>Comparing KNN, Decision Tree, ANN, SVM and LDA classifiers with 2-fold cross-validation</a:t>
             </a:r>
             <a:endParaRPr lang="en-US" sz="2200" dirty="0"/>
           </a:p>
@@ -11706,40 +11703,7 @@
                 <a:ea typeface="Calibri" pitchFamily="34" charset="-122"/>
                 <a:cs typeface="Calibri" pitchFamily="34" charset="-120"/>
               </a:rPr>
-              <a:t>A bank account lets people save safely, borrow, insure against risk and receive payments. Across sub-Saharan Africa, only about half of adults hold any account, and far fewer hold a formal bank account (</a:t>
-            </a:r>
-            <a:r>
-              <a:rPr lang="nl-NL" sz="1550" dirty="0">
-                <a:solidFill>
-                  <a:srgbClr val="0B0B0B"/>
-                </a:solidFill>
-                <a:latin typeface="Calibri" pitchFamily="34" charset="0"/>
-                <a:ea typeface="Calibri" pitchFamily="34" charset="-122"/>
-                <a:cs typeface="Calibri" pitchFamily="34" charset="-120"/>
-              </a:rPr>
-              <a:t>Demirguc-Kunt et al, 2022</a:t>
-            </a:r>
-            <a:r>
-              <a:rPr lang="fi-FI" sz="1550" dirty="0">
-                <a:solidFill>
-                  <a:srgbClr val="0B0B0B"/>
-                </a:solidFill>
-                <a:latin typeface="Calibri" pitchFamily="34" charset="0"/>
-                <a:ea typeface="Calibri" pitchFamily="34" charset="-122"/>
-                <a:cs typeface="Calibri" pitchFamily="34" charset="-120"/>
-              </a:rPr>
-              <a:t>)</a:t>
-            </a:r>
-            <a:r>
-              <a:rPr lang="en-US" sz="1550" dirty="0">
-                <a:solidFill>
-                  <a:srgbClr val="0B0B0B"/>
-                </a:solidFill>
-                <a:latin typeface="Calibri" pitchFamily="34" charset="0"/>
-                <a:ea typeface="Calibri" pitchFamily="34" charset="-122"/>
-                <a:cs typeface="Calibri" pitchFamily="34" charset="-120"/>
-              </a:rPr>
-              <a:t>. Knowing who is excluded, and which characteristics predict exclusion, helps banks, mobile-money operators and policymakers target the right products and policy.</a:t>
+              <a:t>A bank account lets people save safely, borrow, insure against risk and receive payments. Across sub-Saharan Africa, only about half of adults hold any account, and far fewer hold a formal bank account (Demirgüç-Kunt et al., 2022). Knowing who is excluded, and which characteristics predict exclusion, helps banks, mobile-money operators and policymakers target the right products and policy.</a:t>
             </a:r>
           </a:p>
           <a:p>
@@ -11772,7 +11736,7 @@
                 <a:ea typeface="Calibri" pitchFamily="34" charset="-122"/>
                 <a:cs typeface="Calibri" pitchFamily="34" charset="-120"/>
               </a:rPr>
-              <a:t>This project tests whether four standard machine-learning methods can learn that prediction from national survey data, and which method does it best.</a:t>
+              <a:t>This project tests whether five standard machine-learning methods can learn that prediction from national survey data, and which method does it best.</a:t>
             </a:r>
             <a:endParaRPr lang="en-US" sz="1550" dirty="0"/>
           </a:p>
@@ -12725,7 +12689,7 @@
                 <a:ea typeface="Calibri" pitchFamily="34" charset="-122"/>
                 <a:cs typeface="Calibri" pitchFamily="34" charset="-120"/>
               </a:rPr>
-              <a:t>4. Comparing classic classifiers - The IJRASET 2024 comparative analysis</a:t>
+              <a:t>4. Comparing classic classifiers - Acharya &amp; Shaileshbhai (2024)</a:t>
             </a:r>
             <a:endParaRPr lang="en-US" sz="1400" dirty="0"/>
           </a:p>
@@ -13546,7 +13510,7 @@
         <p:spPr>
           <a:xfrm>
             <a:off x="640080" y="1554480"/>
-            <a:ext cx="2670048" cy="3931920"/>
+            <a:ext cx="2075688" cy="3931920"/>
           </a:xfrm>
           <a:prstGeom prst="roundRect">
             <a:avLst>
@@ -13574,7 +13538,7 @@
         </p:nvSpPr>
         <p:spPr>
           <a:xfrm>
-            <a:off x="1609344" y="1874520"/>
+            <a:off x="1312164" y="1874520"/>
             <a:ext cx="731520" cy="731520"/>
           </a:xfrm>
           <a:prstGeom prst="ellipse">
@@ -13609,7 +13573,7 @@
         </p:blipFill>
         <p:spPr>
           <a:xfrm>
-            <a:off x="1799539" y="2064715"/>
+            <a:off x="1504188" y="2064715"/>
             <a:ext cx="351130" cy="351130"/>
           </a:xfrm>
           <a:prstGeom prst="rect">
@@ -13626,7 +13590,7 @@
         <p:spPr>
           <a:xfrm>
             <a:off x="640080" y="2743200"/>
-            <a:ext cx="2670048" cy="457200"/>
+            <a:ext cx="2075688" cy="457200"/>
           </a:xfrm>
           <a:prstGeom prst="rect">
             <a:avLst/>
@@ -13664,8 +13628,8 @@
         </p:nvSpPr>
         <p:spPr>
           <a:xfrm>
-            <a:off x="868680" y="3246120"/>
-            <a:ext cx="2212848" cy="1417320"/>
+            <a:off x="777240" y="3246120"/>
+            <a:ext cx="1801368" cy="1417320"/>
           </a:xfrm>
           <a:prstGeom prst="rect">
             <a:avLst/>
@@ -13703,8 +13667,8 @@
         </p:nvSpPr>
         <p:spPr>
           <a:xfrm>
-            <a:off x="868680" y="4709160"/>
-            <a:ext cx="2212848" cy="685800"/>
+            <a:off x="777240" y="4709160"/>
+            <a:ext cx="1801368" cy="685800"/>
           </a:xfrm>
           <a:prstGeom prst="rect">
             <a:avLst/>
@@ -13742,8 +13706,8 @@
         </p:nvSpPr>
         <p:spPr>
           <a:xfrm>
-            <a:off x="3474720" y="1554480"/>
-            <a:ext cx="2670048" cy="3931920"/>
+            <a:off x="2848356" y="1554480"/>
+            <a:ext cx="2075688" cy="3931920"/>
           </a:xfrm>
           <a:prstGeom prst="roundRect">
             <a:avLst>
@@ -13771,7 +13735,7 @@
         </p:nvSpPr>
         <p:spPr>
           <a:xfrm>
-            <a:off x="4443984" y="1874520"/>
+            <a:off x="3520440" y="1874520"/>
             <a:ext cx="731520" cy="731520"/>
           </a:xfrm>
           <a:prstGeom prst="ellipse">
@@ -13806,7 +13770,7 @@
         </p:blipFill>
         <p:spPr>
           <a:xfrm>
-            <a:off x="4634179" y="2064715"/>
+            <a:off x="3712464" y="2064715"/>
             <a:ext cx="351130" cy="351130"/>
           </a:xfrm>
           <a:prstGeom prst="rect">
@@ -13822,8 +13786,8 @@
         </p:nvSpPr>
         <p:spPr>
           <a:xfrm>
-            <a:off x="3474720" y="2743200"/>
-            <a:ext cx="2670048" cy="457200"/>
+            <a:off x="2848356" y="2743200"/>
+            <a:ext cx="2075688" cy="457200"/>
           </a:xfrm>
           <a:prstGeom prst="rect">
             <a:avLst/>
@@ -13861,8 +13825,8 @@
         </p:nvSpPr>
         <p:spPr>
           <a:xfrm>
-            <a:off x="3703320" y="3246120"/>
-            <a:ext cx="2212848" cy="1417320"/>
+            <a:off x="2985516" y="3246120"/>
+            <a:ext cx="1801368" cy="1417320"/>
           </a:xfrm>
           <a:prstGeom prst="rect">
             <a:avLst/>
@@ -13900,8 +13864,8 @@
         </p:nvSpPr>
         <p:spPr>
           <a:xfrm>
-            <a:off x="3703320" y="4709160"/>
-            <a:ext cx="2212848" cy="685800"/>
+            <a:off x="2985516" y="4709160"/>
+            <a:ext cx="1801368" cy="685800"/>
           </a:xfrm>
           <a:prstGeom prst="rect">
             <a:avLst/>
@@ -13939,8 +13903,8 @@
         </p:nvSpPr>
         <p:spPr>
           <a:xfrm>
-            <a:off x="6309360" y="1554480"/>
-            <a:ext cx="2670048" cy="3931920"/>
+            <a:off x="5056632" y="1554480"/>
+            <a:ext cx="2075688" cy="3931920"/>
           </a:xfrm>
           <a:prstGeom prst="roundRect">
             <a:avLst>
@@ -13968,7 +13932,7 @@
         </p:nvSpPr>
         <p:spPr>
           <a:xfrm>
-            <a:off x="7278624" y="1874520"/>
+            <a:off x="5728716" y="1874520"/>
             <a:ext cx="731520" cy="731520"/>
           </a:xfrm>
           <a:prstGeom prst="ellipse">
@@ -14003,7 +13967,7 @@
         </p:blipFill>
         <p:spPr>
           <a:xfrm>
-            <a:off x="7468819" y="2064715"/>
+            <a:off x="5920740" y="2064715"/>
             <a:ext cx="351130" cy="351130"/>
           </a:xfrm>
           <a:prstGeom prst="rect">
@@ -14019,8 +13983,8 @@
         </p:nvSpPr>
         <p:spPr>
           <a:xfrm>
-            <a:off x="6309360" y="2743200"/>
-            <a:ext cx="2670048" cy="457200"/>
+            <a:off x="5056632" y="2743200"/>
+            <a:ext cx="2075688" cy="457200"/>
           </a:xfrm>
           <a:prstGeom prst="rect">
             <a:avLst/>
@@ -14058,8 +14022,8 @@
         </p:nvSpPr>
         <p:spPr>
           <a:xfrm>
-            <a:off x="6537960" y="3246120"/>
-            <a:ext cx="2212848" cy="1417320"/>
+            <a:off x="5193792" y="3246120"/>
+            <a:ext cx="1801368" cy="1417320"/>
           </a:xfrm>
           <a:prstGeom prst="rect">
             <a:avLst/>
@@ -14097,8 +14061,8 @@
         </p:nvSpPr>
         <p:spPr>
           <a:xfrm>
-            <a:off x="6537960" y="4709160"/>
-            <a:ext cx="2212848" cy="685800"/>
+            <a:off x="5193792" y="4709160"/>
+            <a:ext cx="1801368" cy="685800"/>
           </a:xfrm>
           <a:prstGeom prst="rect">
             <a:avLst/>
@@ -14136,8 +14100,8 @@
         </p:nvSpPr>
         <p:spPr>
           <a:xfrm>
-            <a:off x="9144000" y="1554480"/>
-            <a:ext cx="2670048" cy="3931920"/>
+            <a:off x="7264908" y="1554480"/>
+            <a:ext cx="2075688" cy="3931920"/>
           </a:xfrm>
           <a:prstGeom prst="roundRect">
             <a:avLst>
@@ -14165,14 +14129,14 @@
         </p:nvSpPr>
         <p:spPr>
           <a:xfrm>
-            <a:off x="10113264" y="1874520"/>
+            <a:off x="7936992" y="1874520"/>
             <a:ext cx="731520" cy="731520"/>
           </a:xfrm>
           <a:prstGeom prst="ellipse">
             <a:avLst/>
           </a:prstGeom>
           <a:solidFill>
-            <a:srgbClr val="EB6834"/>
+            <a:srgbClr val="2A78D6"/>
           </a:solidFill>
           <a:ln/>
         </p:spPr>
@@ -14200,7 +14164,7 @@
         </p:blipFill>
         <p:spPr>
           <a:xfrm>
-            <a:off x="10303459" y="2064715"/>
+            <a:off x="8129016" y="2064715"/>
             <a:ext cx="351130" cy="351130"/>
           </a:xfrm>
           <a:prstGeom prst="rect">
@@ -14216,8 +14180,8 @@
         </p:nvSpPr>
         <p:spPr>
           <a:xfrm>
-            <a:off x="9144000" y="2743200"/>
-            <a:ext cx="2670048" cy="457200"/>
+            <a:off x="7264908" y="2743200"/>
+            <a:ext cx="2075688" cy="457200"/>
           </a:xfrm>
           <a:prstGeom prst="rect">
             <a:avLst/>
@@ -14255,8 +14219,8 @@
         </p:nvSpPr>
         <p:spPr>
           <a:xfrm>
-            <a:off x="9372600" y="3246120"/>
-            <a:ext cx="2212848" cy="1417320"/>
+            <a:off x="7402068" y="3246120"/>
+            <a:ext cx="1801368" cy="1417320"/>
           </a:xfrm>
           <a:prstGeom prst="rect">
             <a:avLst/>
@@ -14294,8 +14258,8 @@
         </p:nvSpPr>
         <p:spPr>
           <a:xfrm>
-            <a:off x="9372600" y="4709160"/>
-            <a:ext cx="2212848" cy="685800"/>
+            <a:off x="7402068" y="4709160"/>
+            <a:ext cx="1801368" cy="685800"/>
           </a:xfrm>
           <a:prstGeom prst="rect">
             <a:avLst/>
@@ -14358,12 +14322,209 @@
                 <a:ea typeface="Calibri" pitchFamily="34" charset="-122"/>
                 <a:cs typeface="Calibri" pitchFamily="34" charset="-120"/>
               </a:rPr>
-              <a:t>Same data, same preprocessing, same 2-fold stratified cross-validation for all four models - so any accuracy difference comes down to the algorithm itself.</a:t>
+              <a:t>Same data, same preprocessing, same 2-fold stratified cross-validation for all five models - so any accuracy difference comes down to the algorithm itself.</a:t>
             </a:r>
             <a:endParaRPr lang="en-US" sz="1400" dirty="0"/>
           </a:p>
         </p:txBody>
       </p:sp>
+      <p:sp>
+        <p:nvSpPr>
+          <p:cNvPr id="28" name="LDA_28"/>
+          <p:cNvSpPr/>
+          <p:nvPr/>
+        </p:nvSpPr>
+        <p:spPr>
+          <a:xfrm>
+            <a:off x="9473184" y="1554480"/>
+            <a:ext cx="2075688" cy="3931920"/>
+          </a:xfrm>
+          <a:prstGeom prst="roundRect">
+            <a:avLst>
+              <a:gd name="adj" fmla="val 3425"/>
+            </a:avLst>
+          </a:prstGeom>
+          <a:solidFill>
+            <a:srgbClr val="F2F5FB"/>
+          </a:solidFill>
+          <a:ln/>
+        </p:spPr>
+        <p:txBody>
+          <a:bodyPr/>
+          <a:lstStyle/>
+          <a:p>
+            <a:endParaRPr lang="en-GB"/>
+          </a:p>
+        </p:txBody>
+      </p:sp>
+      <p:sp>
+        <p:nvSpPr>
+          <p:cNvPr id="29" name="LDA_29"/>
+          <p:cNvSpPr/>
+          <p:nvPr/>
+        </p:nvSpPr>
+        <p:spPr>
+          <a:xfrm>
+            <a:off x="10145267" y="1874520"/>
+            <a:ext cx="731520" cy="731520"/>
+          </a:xfrm>
+          <a:prstGeom prst="ellipse">
+            <a:avLst/>
+          </a:prstGeom>
+          <a:solidFill>
+            <a:srgbClr val="EB6834"/>
+          </a:solidFill>
+          <a:ln/>
+        </p:spPr>
+        <p:txBody>
+          <a:bodyPr/>
+          <a:lstStyle/>
+          <a:p>
+            <a:endParaRPr lang="en-GB"/>
+          </a:p>
+        </p:txBody>
+      </p:sp>
+      <p:sp>
+        <p:nvSpPr>
+          <p:cNvPr id="30" name="LDA_30"/>
+          <p:cNvSpPr/>
+          <p:nvPr/>
+        </p:nvSpPr>
+        <p:spPr>
+          <a:xfrm>
+            <a:off x="9473184" y="2743200"/>
+            <a:ext cx="2075688" cy="457200"/>
+          </a:xfrm>
+          <a:prstGeom prst="rect">
+            <a:avLst/>
+          </a:prstGeom>
+          <a:noFill/>
+          <a:ln/>
+        </p:spPr>
+        <p:txBody>
+          <a:bodyPr wrap="square" lIns="0" tIns="0" rIns="0" bIns="0" rtlCol="0" anchor="ctr"/>
+          <a:lstStyle/>
+          <a:p>
+            <a:pPr marL="0" indent="0" algn="ctr">
+              <a:buNone/>
+            </a:pPr>
+            <a:r>
+              <a:rPr lang="en-US" sz="1900" b="1" dirty="0">
+                <a:solidFill>
+                  <a:srgbClr val="1E2761"/>
+                </a:solidFill>
+                <a:latin typeface="Calibri" pitchFamily="34" charset="0"/>
+                <a:ea typeface="Calibri" pitchFamily="34" charset="-122"/>
+                <a:cs typeface="Calibri" pitchFamily="34" charset="-120"/>
+              </a:rPr>
+              <a:t>LDA</a:t>
+            </a:r>
+            <a:endParaRPr lang="en-US" sz="1900" dirty="0"/>
+          </a:p>
+        </p:txBody>
+      </p:sp>
+      <p:sp>
+        <p:nvSpPr>
+          <p:cNvPr id="31" name="LDA_31"/>
+          <p:cNvSpPr/>
+          <p:nvPr/>
+        </p:nvSpPr>
+        <p:spPr>
+          <a:xfrm>
+            <a:off x="9610344" y="3246120"/>
+            <a:ext cx="1801368" cy="1417320"/>
+          </a:xfrm>
+          <a:prstGeom prst="rect">
+            <a:avLst/>
+          </a:prstGeom>
+          <a:noFill/>
+          <a:ln/>
+        </p:spPr>
+        <p:txBody>
+          <a:bodyPr wrap="square" lIns="0" tIns="0" rIns="0" bIns="0" rtlCol="0" anchor="t"/>
+          <a:lstStyle/>
+          <a:p>
+            <a:pPr marL="0" indent="0" algn="ctr">
+              <a:buNone/>
+            </a:pPr>
+            <a:r>
+              <a:rPr lang="en-US" sz="1250" dirty="0">
+                <a:solidFill>
+                  <a:srgbClr val="0B0B0B"/>
+                </a:solidFill>
+                <a:latin typeface="Calibri" pitchFamily="34" charset="0"/>
+                <a:ea typeface="Calibri" pitchFamily="34" charset="-122"/>
+                <a:cs typeface="Calibri" pitchFamily="34" charset="-120"/>
+              </a:rPr>
+              <a:t>Finds the straight line that best separates the two classes.</a:t>
+            </a:r>
+            <a:endParaRPr lang="en-US" sz="1250" dirty="0"/>
+          </a:p>
+        </p:txBody>
+      </p:sp>
+      <p:sp>
+        <p:nvSpPr>
+          <p:cNvPr id="32" name="LDA_32"/>
+          <p:cNvSpPr/>
+          <p:nvPr/>
+        </p:nvSpPr>
+        <p:spPr>
+          <a:xfrm>
+            <a:off x="9610344" y="4709160"/>
+            <a:ext cx="1801368" cy="685800"/>
+          </a:xfrm>
+          <a:prstGeom prst="rect">
+            <a:avLst/>
+          </a:prstGeom>
+          <a:noFill/>
+          <a:ln/>
+        </p:spPr>
+        <p:txBody>
+          <a:bodyPr wrap="square" lIns="0" tIns="0" rIns="0" bIns="0" rtlCol="0" anchor="t"/>
+          <a:lstStyle/>
+          <a:p>
+            <a:pPr marL="0" indent="0" algn="ctr">
+              <a:buNone/>
+            </a:pPr>
+            <a:r>
+              <a:rPr lang="en-US" sz="1100" i="1" dirty="0">
+                <a:solidFill>
+                  <a:srgbClr val="5E5D59"/>
+                </a:solidFill>
+                <a:latin typeface="Calibri" pitchFamily="34" charset="0"/>
+                <a:ea typeface="Calibri" pitchFamily="34" charset="-122"/>
+                <a:cs typeface="Calibri" pitchFamily="34" charset="-120"/>
+              </a:rPr>
+              <a:t>solver = svd, no tuning needed</a:t>
+            </a:r>
+            <a:endParaRPr lang="en-US" sz="1100" dirty="0"/>
+          </a:p>
+        </p:txBody>
+      </p:sp>
+      <p:pic>
+        <p:nvPicPr>
+          <p:cNvPr id="33" name="Picture 32" descr="chartline.png"/>
+          <p:cNvPicPr>
+            <a:picLocks noChangeAspect="1"/>
+          </p:cNvPicPr>
+          <p:nvPr/>
+        </p:nvPicPr>
+        <p:blipFill>
+          <a:blip r:embed="rId7"/>
+          <a:stretch>
+            <a:fillRect/>
+          </a:stretch>
+        </p:blipFill>
+        <p:spPr>
+          <a:xfrm>
+            <a:off x="10337292" y="2066543"/>
+            <a:ext cx="347472" cy="347472"/>
+          </a:xfrm>
+          <a:prstGeom prst="rect">
+            <a:avLst/>
+          </a:prstGeom>
+        </p:spPr>
+      </p:pic>
     </p:spTree>
   </p:cSld>
   <p:clrMapOvr>
@@ -14603,18 +14764,7 @@
                 <a:ea typeface="Calibri" pitchFamily="34" charset="-122"/>
                 <a:cs typeface="Calibri" pitchFamily="34" charset="-120"/>
               </a:rPr>
-              <a:t>The benchmark is 85.9%.  </a:t>
-            </a:r>
-            <a:r>
-              <a:rPr lang="en-US" sz="1250" dirty="0">
-                <a:solidFill>
-                  <a:srgbClr val="0B0B0B"/>
-                </a:solidFill>
-                <a:latin typeface="Calibri" pitchFamily="34" charset="0"/>
-                <a:ea typeface="Calibri" pitchFamily="34" charset="-122"/>
-                <a:cs typeface="Calibri" pitchFamily="34" charset="-120"/>
-              </a:rPr>
-              <a:t>Always answering “No account” scores 85.9%; All 4 models beat the benchmark, but by at most 2.9 points.</a:t>
+              <a:t>The benchmark is 85.9%.  Always answering “No account” scores 85.9%; All 5 models beat the benchmark, but by at most 2.9 points.</a:t>
             </a:r>
             <a:endParaRPr lang="en-US" sz="1250" dirty="0"/>
           </a:p>
@@ -14707,7 +14857,7 @@
           </p:nvPr>
         </p:nvGraphicFramePr>
         <p:xfrm>
-          <a:off x="640080" y="1554480"/>
+          <a:off x="640080" y="1371600"/>
           <a:ext cx="10881360" cy="2834640"/>
         </p:xfrm>
         <a:graphic>
@@ -14765,7 +14915,7 @@
                   </a:extLst>
                 </a:gridCol>
               </a:tblGrid>
-              <a:tr h="566928">
+              <a:tr h="420624">
                 <a:tc>
                   <a:txBody>
                     <a:bodyPr/>
@@ -15248,7 +15398,7 @@
                   </a:ext>
                 </a:extLst>
               </a:tr>
-              <a:tr h="566928">
+              <a:tr h="420624">
                 <a:tc>
                   <a:txBody>
                     <a:bodyPr/>
@@ -15731,7 +15881,7 @@
                   </a:ext>
                 </a:extLst>
               </a:tr>
-              <a:tr h="566928">
+              <a:tr h="420624">
                 <a:tc>
                   <a:txBody>
                     <a:bodyPr/>
@@ -16214,7 +16364,7 @@
                   </a:ext>
                 </a:extLst>
               </a:tr>
-              <a:tr h="566928">
+              <a:tr h="420624">
                 <a:tc>
                   <a:txBody>
                     <a:bodyPr/>
@@ -16697,7 +16847,7 @@
                   </a:ext>
                 </a:extLst>
               </a:tr>
-              <a:tr h="566928">
+              <a:tr h="420624">
                 <a:tc>
                   <a:txBody>
                     <a:bodyPr/>
@@ -17180,6 +17330,489 @@
                   </a:ext>
                 </a:extLst>
               </a:tr>
+              <a:tr h="420624">
+                <a:tc>
+                  <a:txBody>
+                    <a:bodyPr/>
+                    <a:lstStyle/>
+                    <a:p>
+                      <a:pPr marL="0" indent="0" algn="l">
+                        <a:buNone/>
+                      </a:pPr>
+                      <a:r>
+                        <a:rPr lang="en-US" sz="1400" b="1" dirty="0">
+                          <a:solidFill>
+                            <a:srgbClr val="1E2761"/>
+                          </a:solidFill>
+                          <a:latin typeface="Calibri" pitchFamily="34" charset="0"/>
+                          <a:ea typeface="Calibri" pitchFamily="34" charset="-122"/>
+                          <a:cs typeface="Calibri" pitchFamily="34" charset="-120"/>
+                        </a:rPr>
+                        <a:t>LDA</a:t>
+                      </a:r>
+                      <a:endParaRPr lang="en-US" sz="1400" dirty="0">
+                        <a:latin typeface="Calibri" charset="0"/>
+                        <a:ea typeface="Calibri" charset="0"/>
+                        <a:cs typeface="Calibri" charset="0"/>
+                      </a:endParaRPr>
+                    </a:p>
+                  </a:txBody>
+                  <a:tcPr anchor="ctr">
+                    <a:lnL w="9525" cap="flat" cmpd="sng" algn="ctr">
+                      <a:solidFill>
+                        <a:srgbClr val="D8DCE6"/>
+                      </a:solidFill>
+                      <a:prstDash val="solid"/>
+                      <a:round/>
+                      <a:headEnd type="none" w="med" len="med"/>
+                      <a:tailEnd type="none" w="med" len="med"/>
+                    </a:lnL>
+                    <a:lnR w="9525" cap="flat" cmpd="sng" algn="ctr">
+                      <a:solidFill>
+                        <a:srgbClr val="D8DCE6"/>
+                      </a:solidFill>
+                      <a:prstDash val="solid"/>
+                      <a:round/>
+                      <a:headEnd type="none" w="med" len="med"/>
+                      <a:tailEnd type="none" w="med" len="med"/>
+                    </a:lnR>
+                    <a:lnT w="9525" cap="flat" cmpd="sng" algn="ctr">
+                      <a:solidFill>
+                        <a:srgbClr val="D8DCE6"/>
+                      </a:solidFill>
+                      <a:prstDash val="solid"/>
+                      <a:round/>
+                      <a:headEnd type="none" w="med" len="med"/>
+                      <a:tailEnd type="none" w="med" len="med"/>
+                    </a:lnT>
+                    <a:lnB w="9525" cap="flat" cmpd="sng" algn="ctr">
+                      <a:solidFill>
+                        <a:srgbClr val="D8DCE6"/>
+                      </a:solidFill>
+                      <a:prstDash val="solid"/>
+                      <a:round/>
+                      <a:headEnd type="none" w="med" len="med"/>
+                      <a:tailEnd type="none" w="med" len="med"/>
+                    </a:lnB>
+                    <a:solidFill>
+                      <a:srgbClr val="FFFFFF"/>
+                    </a:solidFill>
+                  </a:tcPr>
+                </a:tc>
+                <a:tc>
+                  <a:txBody>
+                    <a:bodyPr/>
+                    <a:lstStyle/>
+                    <a:p>
+                      <a:pPr marL="0" indent="0" algn="ctr">
+                        <a:buNone/>
+                      </a:pPr>
+                      <a:r>
+                        <a:rPr lang="en-US" sz="1400" dirty="0">
+                          <a:solidFill>
+                            <a:srgbClr val="0B0B0B"/>
+                          </a:solidFill>
+                          <a:latin typeface="Calibri" pitchFamily="34" charset="0"/>
+                          <a:ea typeface="Calibri" pitchFamily="34" charset="-122"/>
+                          <a:cs typeface="Calibri" pitchFamily="34" charset="-120"/>
+                        </a:rPr>
+                        <a:t>0.8796</a:t>
+                      </a:r>
+                      <a:endParaRPr lang="en-US" sz="1400" dirty="0">
+                        <a:latin typeface="Calibri" charset="0"/>
+                        <a:ea typeface="Calibri" charset="0"/>
+                        <a:cs typeface="Calibri" charset="0"/>
+                      </a:endParaRPr>
+                    </a:p>
+                  </a:txBody>
+                  <a:tcPr anchor="ctr">
+                    <a:lnL w="9525" cap="flat" cmpd="sng" algn="ctr">
+                      <a:solidFill>
+                        <a:srgbClr val="D8DCE6"/>
+                      </a:solidFill>
+                      <a:prstDash val="solid"/>
+                      <a:round/>
+                      <a:headEnd type="none" w="med" len="med"/>
+                      <a:tailEnd type="none" w="med" len="med"/>
+                    </a:lnL>
+                    <a:lnR w="9525" cap="flat" cmpd="sng" algn="ctr">
+                      <a:solidFill>
+                        <a:srgbClr val="D8DCE6"/>
+                      </a:solidFill>
+                      <a:prstDash val="solid"/>
+                      <a:round/>
+                      <a:headEnd type="none" w="med" len="med"/>
+                      <a:tailEnd type="none" w="med" len="med"/>
+                    </a:lnR>
+                    <a:lnT w="9525" cap="flat" cmpd="sng" algn="ctr">
+                      <a:solidFill>
+                        <a:srgbClr val="D8DCE6"/>
+                      </a:solidFill>
+                      <a:prstDash val="solid"/>
+                      <a:round/>
+                      <a:headEnd type="none" w="med" len="med"/>
+                      <a:tailEnd type="none" w="med" len="med"/>
+                    </a:lnT>
+                    <a:lnB w="9525" cap="flat" cmpd="sng" algn="ctr">
+                      <a:solidFill>
+                        <a:srgbClr val="D8DCE6"/>
+                      </a:solidFill>
+                      <a:prstDash val="solid"/>
+                      <a:round/>
+                      <a:headEnd type="none" w="med" len="med"/>
+                      <a:tailEnd type="none" w="med" len="med"/>
+                    </a:lnB>
+                    <a:solidFill>
+                      <a:srgbClr val="FFFFFF"/>
+                    </a:solidFill>
+                  </a:tcPr>
+                </a:tc>
+                <a:tc>
+                  <a:txBody>
+                    <a:bodyPr/>
+                    <a:lstStyle/>
+                    <a:p>
+                      <a:pPr marL="0" indent="0" algn="ctr">
+                        <a:buNone/>
+                      </a:pPr>
+                      <a:r>
+                        <a:rPr lang="en-US" sz="1400" dirty="0">
+                          <a:solidFill>
+                            <a:srgbClr val="0B0B0B"/>
+                          </a:solidFill>
+                          <a:latin typeface="Calibri" pitchFamily="34" charset="0"/>
+                          <a:ea typeface="Calibri" pitchFamily="34" charset="-122"/>
+                          <a:cs typeface="Calibri" pitchFamily="34" charset="-120"/>
+                        </a:rPr>
+                        <a:t>0.8808</a:t>
+                      </a:r>
+                      <a:endParaRPr lang="en-US" sz="1400" dirty="0">
+                        <a:latin typeface="Calibri" charset="0"/>
+                        <a:ea typeface="Calibri" charset="0"/>
+                        <a:cs typeface="Calibri" charset="0"/>
+                      </a:endParaRPr>
+                    </a:p>
+                  </a:txBody>
+                  <a:tcPr anchor="ctr">
+                    <a:lnL w="9525" cap="flat" cmpd="sng" algn="ctr">
+                      <a:solidFill>
+                        <a:srgbClr val="D8DCE6"/>
+                      </a:solidFill>
+                      <a:prstDash val="solid"/>
+                      <a:round/>
+                      <a:headEnd type="none" w="med" len="med"/>
+                      <a:tailEnd type="none" w="med" len="med"/>
+                    </a:lnL>
+                    <a:lnR w="9525" cap="flat" cmpd="sng" algn="ctr">
+                      <a:solidFill>
+                        <a:srgbClr val="D8DCE6"/>
+                      </a:solidFill>
+                      <a:prstDash val="solid"/>
+                      <a:round/>
+                      <a:headEnd type="none" w="med" len="med"/>
+                      <a:tailEnd type="none" w="med" len="med"/>
+                    </a:lnR>
+                    <a:lnT w="9525" cap="flat" cmpd="sng" algn="ctr">
+                      <a:solidFill>
+                        <a:srgbClr val="D8DCE6"/>
+                      </a:solidFill>
+                      <a:prstDash val="solid"/>
+                      <a:round/>
+                      <a:headEnd type="none" w="med" len="med"/>
+                      <a:tailEnd type="none" w="med" len="med"/>
+                    </a:lnT>
+                    <a:lnB w="9525" cap="flat" cmpd="sng" algn="ctr">
+                      <a:solidFill>
+                        <a:srgbClr val="D8DCE6"/>
+                      </a:solidFill>
+                      <a:prstDash val="solid"/>
+                      <a:round/>
+                      <a:headEnd type="none" w="med" len="med"/>
+                      <a:tailEnd type="none" w="med" len="med"/>
+                    </a:lnB>
+                    <a:solidFill>
+                      <a:srgbClr val="FFFFFF"/>
+                    </a:solidFill>
+                  </a:tcPr>
+                </a:tc>
+                <a:tc>
+                  <a:txBody>
+                    <a:bodyPr/>
+                    <a:lstStyle/>
+                    <a:p>
+                      <a:pPr marL="0" indent="0" algn="ctr">
+                        <a:buNone/>
+                      </a:pPr>
+                      <a:r>
+                        <a:rPr lang="en-US" sz="1400" b="1" dirty="0">
+                          <a:solidFill>
+                            <a:srgbClr val="0B0B0B"/>
+                          </a:solidFill>
+                          <a:latin typeface="Calibri" pitchFamily="34" charset="0"/>
+                          <a:ea typeface="Calibri" pitchFamily="34" charset="-122"/>
+                          <a:cs typeface="Calibri" pitchFamily="34" charset="-120"/>
+                        </a:rPr>
+                        <a:t>0.8802</a:t>
+                      </a:r>
+                      <a:endParaRPr lang="en-US" sz="1400" dirty="0">
+                        <a:latin typeface="Calibri" charset="0"/>
+                        <a:ea typeface="Calibri" charset="0"/>
+                        <a:cs typeface="Calibri" charset="0"/>
+                      </a:endParaRPr>
+                    </a:p>
+                  </a:txBody>
+                  <a:tcPr anchor="ctr">
+                    <a:lnL w="9525" cap="flat" cmpd="sng" algn="ctr">
+                      <a:solidFill>
+                        <a:srgbClr val="D8DCE6"/>
+                      </a:solidFill>
+                      <a:prstDash val="solid"/>
+                      <a:round/>
+                      <a:headEnd type="none" w="med" len="med"/>
+                      <a:tailEnd type="none" w="med" len="med"/>
+                    </a:lnL>
+                    <a:lnR w="9525" cap="flat" cmpd="sng" algn="ctr">
+                      <a:solidFill>
+                        <a:srgbClr val="D8DCE6"/>
+                      </a:solidFill>
+                      <a:prstDash val="solid"/>
+                      <a:round/>
+                      <a:headEnd type="none" w="med" len="med"/>
+                      <a:tailEnd type="none" w="med" len="med"/>
+                    </a:lnR>
+                    <a:lnT w="9525" cap="flat" cmpd="sng" algn="ctr">
+                      <a:solidFill>
+                        <a:srgbClr val="D8DCE6"/>
+                      </a:solidFill>
+                      <a:prstDash val="solid"/>
+                      <a:round/>
+                      <a:headEnd type="none" w="med" len="med"/>
+                      <a:tailEnd type="none" w="med" len="med"/>
+                    </a:lnT>
+                    <a:lnB w="9525" cap="flat" cmpd="sng" algn="ctr">
+                      <a:solidFill>
+                        <a:srgbClr val="D8DCE6"/>
+                      </a:solidFill>
+                      <a:prstDash val="solid"/>
+                      <a:round/>
+                      <a:headEnd type="none" w="med" len="med"/>
+                      <a:tailEnd type="none" w="med" len="med"/>
+                    </a:lnB>
+                    <a:solidFill>
+                      <a:srgbClr val="FFFFFF"/>
+                    </a:solidFill>
+                  </a:tcPr>
+                </a:tc>
+                <a:tc>
+                  <a:txBody>
+                    <a:bodyPr/>
+                    <a:lstStyle/>
+                    <a:p>
+                      <a:pPr marL="0" indent="0" algn="ctr">
+                        <a:buNone/>
+                      </a:pPr>
+                      <a:r>
+                        <a:rPr lang="en-US" sz="1400" dirty="0">
+                          <a:solidFill>
+                            <a:srgbClr val="0B0B0B"/>
+                          </a:solidFill>
+                          <a:latin typeface="Calibri" pitchFamily="34" charset="0"/>
+                          <a:ea typeface="Calibri" pitchFamily="34" charset="-122"/>
+                          <a:cs typeface="Calibri" pitchFamily="34" charset="-120"/>
+                        </a:rPr>
+                        <a:t>0.8808</a:t>
+                      </a:r>
+                      <a:endParaRPr lang="en-US" sz="1400" dirty="0">
+                        <a:latin typeface="Calibri" charset="0"/>
+                        <a:ea typeface="Calibri" charset="0"/>
+                        <a:cs typeface="Calibri" charset="0"/>
+                      </a:endParaRPr>
+                    </a:p>
+                  </a:txBody>
+                  <a:tcPr anchor="ctr">
+                    <a:lnL w="9525" cap="flat" cmpd="sng" algn="ctr">
+                      <a:solidFill>
+                        <a:srgbClr val="D8DCE6"/>
+                      </a:solidFill>
+                      <a:prstDash val="solid"/>
+                      <a:round/>
+                      <a:headEnd type="none" w="med" len="med"/>
+                      <a:tailEnd type="none" w="med" len="med"/>
+                    </a:lnL>
+                    <a:lnR w="9525" cap="flat" cmpd="sng" algn="ctr">
+                      <a:solidFill>
+                        <a:srgbClr val="D8DCE6"/>
+                      </a:solidFill>
+                      <a:prstDash val="solid"/>
+                      <a:round/>
+                      <a:headEnd type="none" w="med" len="med"/>
+                      <a:tailEnd type="none" w="med" len="med"/>
+                    </a:lnR>
+                    <a:lnT w="9525" cap="flat" cmpd="sng" algn="ctr">
+                      <a:solidFill>
+                        <a:srgbClr val="D8DCE6"/>
+                      </a:solidFill>
+                      <a:prstDash val="solid"/>
+                      <a:round/>
+                      <a:headEnd type="none" w="med" len="med"/>
+                      <a:tailEnd type="none" w="med" len="med"/>
+                    </a:lnT>
+                    <a:lnB w="9525" cap="flat" cmpd="sng" algn="ctr">
+                      <a:solidFill>
+                        <a:srgbClr val="D8DCE6"/>
+                      </a:solidFill>
+                      <a:prstDash val="solid"/>
+                      <a:round/>
+                      <a:headEnd type="none" w="med" len="med"/>
+                      <a:tailEnd type="none" w="med" len="med"/>
+                    </a:lnB>
+                    <a:solidFill>
+                      <a:srgbClr val="FFFFFF"/>
+                    </a:solidFill>
+                  </a:tcPr>
+                </a:tc>
+                <a:tc>
+                  <a:txBody>
+                    <a:bodyPr/>
+                    <a:lstStyle/>
+                    <a:p>
+                      <a:pPr marL="0" indent="0" algn="ctr">
+                        <a:buNone/>
+                      </a:pPr>
+                      <a:r>
+                        <a:rPr lang="en-US" sz="1400" dirty="0">
+                          <a:solidFill>
+                            <a:srgbClr val="0B0B0B"/>
+                          </a:solidFill>
+                          <a:latin typeface="Calibri" pitchFamily="34" charset="0"/>
+                          <a:ea typeface="Calibri" pitchFamily="34" charset="-122"/>
+                          <a:cs typeface="Calibri" pitchFamily="34" charset="-120"/>
+                        </a:rPr>
+                        <a:t>0.0006</a:t>
+                      </a:r>
+                      <a:endParaRPr lang="en-US" sz="1400" dirty="0">
+                        <a:latin typeface="Calibri" charset="0"/>
+                        <a:ea typeface="Calibri" charset="0"/>
+                        <a:cs typeface="Calibri" charset="0"/>
+                      </a:endParaRPr>
+                    </a:p>
+                  </a:txBody>
+                  <a:tcPr anchor="ctr">
+                    <a:lnL w="9525" cap="flat" cmpd="sng" algn="ctr">
+                      <a:solidFill>
+                        <a:srgbClr val="D8DCE6"/>
+                      </a:solidFill>
+                      <a:prstDash val="solid"/>
+                      <a:round/>
+                      <a:headEnd type="none" w="med" len="med"/>
+                      <a:tailEnd type="none" w="med" len="med"/>
+                    </a:lnL>
+                    <a:lnR w="9525" cap="flat" cmpd="sng" algn="ctr">
+                      <a:solidFill>
+                        <a:srgbClr val="D8DCE6"/>
+                      </a:solidFill>
+                      <a:prstDash val="solid"/>
+                      <a:round/>
+                      <a:headEnd type="none" w="med" len="med"/>
+                      <a:tailEnd type="none" w="med" len="med"/>
+                    </a:lnR>
+                    <a:lnT w="9525" cap="flat" cmpd="sng" algn="ctr">
+                      <a:solidFill>
+                        <a:srgbClr val="D8DCE6"/>
+                      </a:solidFill>
+                      <a:prstDash val="solid"/>
+                      <a:round/>
+                      <a:headEnd type="none" w="med" len="med"/>
+                      <a:tailEnd type="none" w="med" len="med"/>
+                    </a:lnT>
+                    <a:lnB w="9525" cap="flat" cmpd="sng" algn="ctr">
+                      <a:solidFill>
+                        <a:srgbClr val="D8DCE6"/>
+                      </a:solidFill>
+                      <a:prstDash val="solid"/>
+                      <a:round/>
+                      <a:headEnd type="none" w="med" len="med"/>
+                      <a:tailEnd type="none" w="med" len="med"/>
+                    </a:lnB>
+                    <a:solidFill>
+                      <a:srgbClr val="FFFFFF"/>
+                    </a:solidFill>
+                  </a:tcPr>
+                </a:tc>
+                <a:tc>
+                  <a:txBody>
+                    <a:bodyPr/>
+                    <a:lstStyle/>
+                    <a:p>
+                      <a:pPr marL="0" indent="0" algn="ctr">
+                        <a:buNone/>
+                      </a:pPr>
+                      <a:r>
+                        <a:rPr lang="en-US" sz="1400" dirty="0">
+                          <a:solidFill>
+                            <a:srgbClr val="0B0B0B"/>
+                          </a:solidFill>
+                          <a:latin typeface="Calibri" pitchFamily="34" charset="0"/>
+                          <a:ea typeface="Calibri" pitchFamily="34" charset="-122"/>
+                          <a:cs typeface="Calibri" pitchFamily="34" charset="-120"/>
+                        </a:rPr>
+                        <a:t>0.3</a:t>
+                      </a:r>
+                      <a:endParaRPr lang="en-US" sz="1400" dirty="0">
+                        <a:latin typeface="Calibri" charset="0"/>
+                        <a:ea typeface="Calibri" charset="0"/>
+                        <a:cs typeface="Calibri" charset="0"/>
+                      </a:endParaRPr>
+                    </a:p>
+                  </a:txBody>
+                  <a:tcPr anchor="ctr">
+                    <a:lnL w="9525" cap="flat" cmpd="sng" algn="ctr">
+                      <a:solidFill>
+                        <a:srgbClr val="D8DCE6"/>
+                      </a:solidFill>
+                      <a:prstDash val="solid"/>
+                      <a:round/>
+                      <a:headEnd type="none" w="med" len="med"/>
+                      <a:tailEnd type="none" w="med" len="med"/>
+                    </a:lnL>
+                    <a:lnR w="9525" cap="flat" cmpd="sng" algn="ctr">
+                      <a:solidFill>
+                        <a:srgbClr val="D8DCE6"/>
+                      </a:solidFill>
+                      <a:prstDash val="solid"/>
+                      <a:round/>
+                      <a:headEnd type="none" w="med" len="med"/>
+                      <a:tailEnd type="none" w="med" len="med"/>
+                    </a:lnR>
+                    <a:lnT w="9525" cap="flat" cmpd="sng" algn="ctr">
+                      <a:solidFill>
+                        <a:srgbClr val="D8DCE6"/>
+                      </a:solidFill>
+                      <a:prstDash val="solid"/>
+                      <a:round/>
+                      <a:headEnd type="none" w="med" len="med"/>
+                      <a:tailEnd type="none" w="med" len="med"/>
+                    </a:lnT>
+                    <a:lnB w="9525" cap="flat" cmpd="sng" algn="ctr">
+                      <a:solidFill>
+                        <a:srgbClr val="D8DCE6"/>
+                      </a:solidFill>
+                      <a:prstDash val="solid"/>
+                      <a:round/>
+                      <a:headEnd type="none" w="med" len="med"/>
+                      <a:tailEnd type="none" w="med" len="med"/>
+                    </a:lnB>
+                    <a:solidFill>
+                      <a:srgbClr val="FFFFFF"/>
+                    </a:solidFill>
+                  </a:tcPr>
+                </a:tc>
+                <a:extLst>
+                  <a:ext uri="{0D108BD9-81ED-4DB2-BD59-A6C34878D82A}">
+                    <a16:rowId xmlns:a16="http://schemas.microsoft.com/office/drawing/2014/main" val="10003"/>
+                  </a:ext>
+                </a:extLst>
+              </a:tr>
             </a:tbl>
           </a:graphicData>
         </a:graphic>
@@ -17382,7 +18015,7 @@
                 <a:ea typeface="Calibri" pitchFamily="34" charset="-122"/>
                 <a:cs typeface="Calibri" pitchFamily="34" charset="-120"/>
               </a:rPr>
-              <a:t>All four models cluster within 1.5 points of each other under CV; the confusion matrices (next slide) separate them further.</a:t>
+              <a:t>All five models cluster within 1.5 points of each other under CV; the confusion matrices (next slide) separate them further.</a:t>
             </a:r>
             <a:endParaRPr lang="en-US" sz="1150" dirty="0"/>
           </a:p>
@@ -17658,7 +18291,7 @@
                 <a:ea typeface="Calibri" pitchFamily="34" charset="-122"/>
                 <a:cs typeface="Calibri" pitchFamily="34" charset="-120"/>
               </a:rPr>
-              <a:t>Every model recognizes non-account-holders almost perfectly (96-98%) but finds only 30-35% of actual account holders.</a:t>
+              <a:t>Every model recognizes non-account-holders almost perfectly (96-98%) but finds only 30-39% of actual account holders.</a:t>
             </a:r>
             <a:endParaRPr lang="en-US" sz="1150" dirty="0"/>
           </a:p>
@@ -17736,7 +18369,7 @@
                 <a:ea typeface="Calibri" pitchFamily="34" charset="-122"/>
                 <a:cs typeface="Calibri" pitchFamily="34" charset="-120"/>
               </a:rPr>
-              <a:t>SVM is the most conservative (fewest false “Yes”: 328) yet misses the most real account holders; ANN finds the most (1,175). Which is “best” depends on the cost of each error.</a:t>
+              <a:t>SVM is the most conservative (fewest false “Yes”: 328) yet misses the most real account holders; LDA finds the most (1,290). Which is “best” depends on the cost of each error.</a:t>
             </a:r>
             <a:endParaRPr lang="en-US" sz="1150" dirty="0"/>
           </a:p>
